--- a/Topic_B/Exam_Practice/TB-L06_Speaking_Workshop_Colours_and_Accurate_Description.pptx
+++ b/Topic_B/Exam_Practice/TB-L06_Speaking_Workshop_Colours_and_Accurate_Description.pptx
@@ -615,7 +615,11 @@
           <a:lstStyle/>
           <a:p>
             <a:r>
-              <a:rPr lang="en-US" dirty="0"/>
+              <a:rPr lang="ar-SA" dirty="0">
+                <a:latin typeface="Amiri" pitchFamily="2" charset="-78"/>
+                <a:ea typeface="Amiri" pitchFamily="2" charset="-78"/>
+                <a:cs typeface="Amiri" pitchFamily="2" charset="-78"/>
+              </a:rPr>
               <a:t>ROLE PLAY C (Develop) — an art gallery.
 SET-UP IN THE BREAKOUT ROOM: A = examiner (reads the left column ONLY — the questions, in order), B = candidate (sees the task column; Core may use the help column), C = observer (ticks the feedback checklist). 1 minute preparation, about 3 minutes speaking, 1 minute feedback, then rotate.
 Task ! is the unexpected question: in the exam the candidate has not seen it — the examiner should read it without warning.
@@ -707,7 +711,11 @@
           <a:lstStyle/>
           <a:p>
             <a:r>
-              <a:rPr lang="en-US" dirty="0"/>
+              <a:rPr lang="ar-SA" dirty="0">
+                <a:latin typeface="Amiri" pitchFamily="2" charset="-78"/>
+                <a:ea typeface="Amiri" pitchFamily="2" charset="-78"/>
+                <a:cs typeface="Amiri" pitchFamily="2" charset="-78"/>
+              </a:rPr>
               <a:t>ROLE PLAY D (Stretch) — a design-school interview.
 SET-UP IN THE BREAKOUT ROOM: A = examiner (reads the left column ONLY — the questions, in order), B = candidate (sees the task column; Core may use the help column), C = observer (ticks the feedback checklist). 1 minute preparation, about 3 minutes speaking, 1 minute feedback, then rotate.
 Task ! is the unexpected question: in the exam the candidate has not seen it — the examiner should read it without warning.
@@ -1243,7 +1251,11 @@
           <a:lstStyle/>
           <a:p>
             <a:r>
-              <a:rPr lang="en-US" dirty="0"/>
+              <a:rPr lang="ar-SA" dirty="0">
+                <a:latin typeface="Amiri" pitchFamily="2" charset="-78"/>
+                <a:ea typeface="Amiri" pitchFamily="2" charset="-78"/>
+                <a:cs typeface="Amiri" pitchFamily="2" charset="-78"/>
+              </a:rPr>
               <a:t>TOPIC CONVERSATION — Core. Examiner asks the questions in order and may add “لِمَاذَا؟ / هَلْ يُمْكِنُ أَنْ تَشْرَحَ أَكْثَرَ؟” to push for more. Candidate aims for one full sentence per question.
 </a:t>
             </a:r>
@@ -1332,7 +1344,11 @@
           <a:lstStyle/>
           <a:p>
             <a:r>
-              <a:rPr lang="en-US" dirty="0"/>
+              <a:rPr lang="ar-SA" dirty="0">
+                <a:latin typeface="Amiri" pitchFamily="2" charset="-78"/>
+                <a:ea typeface="Amiri" pitchFamily="2" charset="-78"/>
+                <a:cs typeface="Amiri" pitchFamily="2" charset="-78"/>
+              </a:rPr>
               <a:t>TOPIC CONVERSATION — Develop. Examiner asks the questions in order and may add “لِمَاذَا؟ / هَلْ يُمْكِنُ أَنْ تَشْرَحَ أَكْثَرَ؟” to push for more. Candidate aims for two or three sentences, with shade, pattern or material.
 </a:t>
             </a:r>
@@ -1421,7 +1437,11 @@
           <a:lstStyle/>
           <a:p>
             <a:r>
-              <a:rPr lang="en-US" dirty="0"/>
+              <a:rPr lang="ar-SA" dirty="0">
+                <a:latin typeface="Amiri" pitchFamily="2" charset="-78"/>
+                <a:ea typeface="Amiri" pitchFamily="2" charset="-78"/>
+                <a:cs typeface="Amiri" pitchFamily="2" charset="-78"/>
+              </a:rPr>
               <a:t>TOPIC CONVERSATION — Stretch. Examiner asks the questions in order and may add “لِمَاذَا؟ / هَلْ يُمْكِنُ أَنْ تَشْرَحَ أَكْثَرَ؟” to push for more. Candidate aims for a developed answer: opinion, comparison, concession and a conditional.
 </a:t>
             </a:r>
@@ -1510,7 +1530,11 @@
           <a:lstStyle/>
           <a:p>
             <a:r>
-              <a:rPr lang="en-US" dirty="0"/>
+              <a:rPr lang="ar-SA" dirty="0">
+                <a:latin typeface="Amiri" pitchFamily="2" charset="-78"/>
+                <a:ea typeface="Amiri" pitchFamily="2" charset="-78"/>
+                <a:cs typeface="Amiri" pitchFamily="2" charset="-78"/>
+              </a:rPr>
               <a:t>WELCOME (1 min) — while students join.
 • Greet each student by name as they arrive: السَّلَامُ عَلَيْكُمْ. Take the register (Pastoral Tracker: attendance 0/1).
 • 2-MINUTE CHECK-IN (SEND training): a private chat to any student who seemed unsettled last lesson — “Are you okay today? 👍 / 👎”.
@@ -2224,7 +2248,11 @@
           <a:lstStyle/>
           <a:p>
             <a:r>
-              <a:rPr lang="en-US" dirty="0"/>
+              <a:rPr lang="ar-SA" dirty="0">
+                <a:latin typeface="Amiri" pitchFamily="2" charset="-78"/>
+                <a:ea typeface="Amiri" pitchFamily="2" charset="-78"/>
+                <a:cs typeface="Amiri" pitchFamily="2" charset="-78"/>
+              </a:rPr>
               <a:t>TEACH (3 min). Role play = precise and complete; conversation = develop. Choral repetition of the repair phrases. To a girl: تُعِيدِي.</a:t>
             </a:r>
             <a:endParaRPr lang="en-US" dirty="0"/>
@@ -2312,7 +2340,11 @@
           <a:lstStyle/>
           <a:p>
             <a:r>
-              <a:rPr lang="en-US" dirty="0"/>
+              <a:rPr lang="ar-SA" dirty="0">
+                <a:latin typeface="Amiri" pitchFamily="2" charset="-78"/>
+                <a:ea typeface="Amiri" pitchFamily="2" charset="-78"/>
+                <a:cs typeface="Amiri" pitchFamily="2" charset="-78"/>
+              </a:rPr>
               <a:t>LANGUAGE BANK (2 min) — the basic colours follow afʿal (m.) · faʿlāʾ (f.) · fuʿl (human pl.): قَمِيصٌ أَحْمَرُ · سَيَّارَةٌ حَمْرَاءُ. They never take tanwīn: أَحْمَرُ (not أَحْمَرٌ). Non-human plurals take the feminine singular: أَزْهَارٌ حَمْرَاءُ.</a:t>
             </a:r>
             <a:endParaRPr lang="en-US" dirty="0"/>
@@ -2400,7 +2432,11 @@
           <a:lstStyle/>
           <a:p>
             <a:r>
-              <a:rPr lang="en-US" dirty="0"/>
+              <a:rPr lang="ar-SA" dirty="0">
+                <a:latin typeface="Amiri" pitchFamily="2" charset="-78"/>
+                <a:ea typeface="Amiri" pitchFamily="2" charset="-78"/>
+                <a:cs typeface="Amiri" pitchFamily="2" charset="-78"/>
+              </a:rPr>
               <a:t>LANGUAGE BANK (2 min) — colours from nouns are regular: بُنِّيٌّ / بُنِّيَّةٌ (from coffee bean) · وَرْدِيٌّ (from rose). Shades follow the colour: أَزْرَقُ فَاتِحٌ · حَقِيبَةٌ زَرْقَاءُ غَامِقَةٌ.</a:t>
             </a:r>
             <a:endParaRPr lang="en-US" dirty="0"/>
@@ -2576,7 +2612,11 @@
           <a:lstStyle/>
           <a:p>
             <a:r>
-              <a:rPr lang="en-US" dirty="0"/>
+              <a:rPr lang="ar-SA" dirty="0">
+                <a:latin typeface="Amiri" pitchFamily="2" charset="-78"/>
+                <a:ea typeface="Amiri" pitchFamily="2" charset="-78"/>
+                <a:cs typeface="Amiri" pitchFamily="2" charset="-78"/>
+              </a:rPr>
               <a:t>ROLE PLAY A (Core) — at the airport.
 SET-UP IN THE BREAKOUT ROOM: A = examiner (reads the left column ONLY — the questions, in order), B = candidate (sees the task column; Core may use the help column), C = observer (ticks the feedback checklist). 1 minute preparation, about 3 minutes speaking, 1 minute feedback, then rotate.
 Task ! is the unexpected question: in the exam the candidate has not seen it — the examiner should read it without warning.
@@ -2668,7 +2708,11 @@
           <a:lstStyle/>
           <a:p>
             <a:r>
-              <a:rPr lang="en-US" dirty="0"/>
+              <a:rPr lang="ar-SA" dirty="0">
+                <a:latin typeface="Amiri" pitchFamily="2" charset="-78"/>
+                <a:ea typeface="Amiri" pitchFamily="2" charset="-78"/>
+                <a:cs typeface="Amiri" pitchFamily="2" charset="-78"/>
+              </a:rPr>
               <a:t>ROLE PLAY B (Core+) — choosing paint.
 SET-UP IN THE BREAKOUT ROOM: A = examiner (reads the left column ONLY — the questions, in order), B = candidate (sees the task column; Core may use the help column), C = observer (ticks the feedback checklist). 1 minute preparation, about 3 minutes speaking, 1 minute feedback, then rotate.
 Task ! is the unexpected question: in the exam the candidate has not seen it — the examiner should read it without warning.
@@ -3156,6 +3200,7 @@
                   <a:srgbClr val="D4AF37"/>
                 </a:solidFill>
                 <a:latin typeface="Amiri" pitchFamily="2" charset="-78"/>
+                <a:ea typeface="Amiri" pitchFamily="2" charset="-78"/>
                 <a:cs typeface="Amiri" pitchFamily="2" charset="-78"/>
               </a:rPr>
               <a:t>م</a:t>
@@ -3362,6 +3407,7 @@
                   <a:srgbClr val="D4AF37"/>
                 </a:solidFill>
                 <a:latin typeface="Amiri" pitchFamily="2" charset="-78"/>
+                <a:ea typeface="Amiri" pitchFamily="2" charset="-78"/>
                 <a:cs typeface="Amiri" pitchFamily="2" charset="-78"/>
               </a:rPr>
               <a:t>وَرْشَةُ التَّحَدُّثِ — الأَلْوَانُ وَالوَصْفُ</a:t>
@@ -3819,6 +3865,7 @@
                   <a:srgbClr val="D4AF37"/>
                 </a:solidFill>
                 <a:latin typeface="Amiri" pitchFamily="2" charset="-78"/>
+                <a:ea typeface="Amiri" pitchFamily="2" charset="-78"/>
                 <a:cs typeface="Amiri" pitchFamily="2" charset="-78"/>
               </a:rPr>
               <a:t>م</a:t>
@@ -4139,6 +4186,7 @@
                   <a:srgbClr val="8A6D1E"/>
                 </a:solidFill>
                 <a:latin typeface="Amiri" pitchFamily="2" charset="-78"/>
+                <a:ea typeface="Amiri" pitchFamily="2" charset="-78"/>
                 <a:cs typeface="Amiri" pitchFamily="2" charset="-78"/>
               </a:rPr>
               <a:t>فِي مَعْرِضِ الفُنُونِ</a:t>
@@ -4419,6 +4467,7 @@
                   <a:srgbClr val="1B3B6F"/>
                 </a:solidFill>
                 <a:latin typeface="Amiri" pitchFamily="2" charset="-78"/>
+                <a:ea typeface="Amiri" pitchFamily="2" charset="-78"/>
                 <a:cs typeface="Amiri" pitchFamily="2" charset="-78"/>
               </a:rPr>
               <a:t>أَنَا فِي … مَعَ …</a:t>
@@ -4495,6 +4544,7 @@
                   <a:srgbClr val="1B3B6F"/>
                 </a:solidFill>
                 <a:latin typeface="Amiri" pitchFamily="2" charset="-78"/>
+                <a:ea typeface="Amiri" pitchFamily="2" charset="-78"/>
                 <a:cs typeface="Amiri" pitchFamily="2" charset="-78"/>
               </a:rPr>
               <a:t>أَيْنَ أَنْتَ؟</a:t>
@@ -4598,6 +4648,7 @@
                   <a:srgbClr val="1B3B6F"/>
                 </a:solidFill>
                 <a:latin typeface="Amiri" pitchFamily="2" charset="-78"/>
+                <a:ea typeface="Amiri" pitchFamily="2" charset="-78"/>
                 <a:cs typeface="Amiri" pitchFamily="2" charset="-78"/>
               </a:rPr>
               <a:t>فِي اللَّوْحَةِ … وَ… وَ…</a:t>
@@ -4674,6 +4725,7 @@
                   <a:srgbClr val="1B3B6F"/>
                 </a:solidFill>
                 <a:latin typeface="Amiri" pitchFamily="2" charset="-78"/>
+                <a:ea typeface="Amiri" pitchFamily="2" charset="-78"/>
                 <a:cs typeface="Amiri" pitchFamily="2" charset="-78"/>
               </a:rPr>
               <a:t>صِفْهَا لِي.</a:t>
@@ -4777,6 +4829,7 @@
                   <a:srgbClr val="1B3B6F"/>
                 </a:solidFill>
                 <a:latin typeface="Amiri" pitchFamily="2" charset="-78"/>
+                <a:ea typeface="Amiri" pitchFamily="2" charset="-78"/>
                 <a:cs typeface="Amiri" pitchFamily="2" charset="-78"/>
               </a:rPr>
               <a:t>عَلَى اليَمِينِ … وَفِي الوَسَطِ …</a:t>
@@ -4853,6 +4906,7 @@
                   <a:srgbClr val="1B3B6F"/>
                 </a:solidFill>
                 <a:latin typeface="Amiri" pitchFamily="2" charset="-78"/>
+                <a:ea typeface="Amiri" pitchFamily="2" charset="-78"/>
                 <a:cs typeface="Amiri" pitchFamily="2" charset="-78"/>
               </a:rPr>
               <a:t>وَأَيْنَ الأَشْخَاصُ؟</a:t>
@@ -4956,6 +5010,7 @@
                   <a:srgbClr val="1B3B6F"/>
                 </a:solidFill>
                 <a:latin typeface="Amiri" pitchFamily="2" charset="-78"/>
+                <a:ea typeface="Amiri" pitchFamily="2" charset="-78"/>
                 <a:cs typeface="Amiri" pitchFamily="2" charset="-78"/>
               </a:rPr>
               <a:t>نَعَمْ، لِأَنَّ الأَلْوَانَ …</a:t>
@@ -5032,6 +5087,7 @@
                   <a:srgbClr val="1B3B6F"/>
                 </a:solidFill>
                 <a:latin typeface="Amiri" pitchFamily="2" charset="-78"/>
+                <a:ea typeface="Amiri" pitchFamily="2" charset="-78"/>
                 <a:cs typeface="Amiri" pitchFamily="2" charset="-78"/>
               </a:rPr>
               <a:t>هَلْ تُعْجِبُكَ؟</a:t>
@@ -5135,6 +5191,7 @@
                   <a:srgbClr val="1B3B6F"/>
                 </a:solidFill>
                 <a:latin typeface="Amiri" pitchFamily="2" charset="-78"/>
+                <a:ea typeface="Amiri" pitchFamily="2" charset="-78"/>
                 <a:cs typeface="Amiri" pitchFamily="2" charset="-78"/>
               </a:rPr>
               <a:t>رَأَيْتُ … كَانَتْ …</a:t>
@@ -5211,6 +5268,7 @@
                   <a:srgbClr val="1B3B6F"/>
                 </a:solidFill>
                 <a:latin typeface="Amiri" pitchFamily="2" charset="-78"/>
+                <a:ea typeface="Amiri" pitchFamily="2" charset="-78"/>
                 <a:cs typeface="Amiri" pitchFamily="2" charset="-78"/>
               </a:rPr>
               <a:t>مَاذَا رَأَيْتَ قَبْلَ ذٰلِكَ؟</a:t>
@@ -5420,6 +5478,7 @@
                   <a:srgbClr val="D4AF37"/>
                 </a:solidFill>
                 <a:latin typeface="Amiri" pitchFamily="2" charset="-78"/>
+                <a:ea typeface="Amiri" pitchFamily="2" charset="-78"/>
                 <a:cs typeface="Amiri" pitchFamily="2" charset="-78"/>
               </a:rPr>
               <a:t>م</a:t>
@@ -5740,6 +5799,7 @@
                   <a:srgbClr val="8A6D1E"/>
                 </a:solidFill>
                 <a:latin typeface="Amiri" pitchFamily="2" charset="-78"/>
+                <a:ea typeface="Amiri" pitchFamily="2" charset="-78"/>
                 <a:cs typeface="Amiri" pitchFamily="2" charset="-78"/>
               </a:rPr>
               <a:t>لِلْأَلْوَانِ مَعَانٍ</a:t>
@@ -6020,6 +6080,7 @@
                   <a:srgbClr val="1B3B6F"/>
                 </a:solidFill>
                 <a:latin typeface="Amiri" pitchFamily="2" charset="-78"/>
+                <a:ea typeface="Amiri" pitchFamily="2" charset="-78"/>
                 <a:cs typeface="Amiri" pitchFamily="2" charset="-78"/>
               </a:rPr>
               <a:t>لَوْنِيَ المُفَضَّلُ … لِأَنَّهُ يُذَكِّرُنِي …</a:t>
@@ -6096,6 +6157,7 @@
                   <a:srgbClr val="1B3B6F"/>
                 </a:solidFill>
                 <a:latin typeface="Amiri" pitchFamily="2" charset="-78"/>
+                <a:ea typeface="Amiri" pitchFamily="2" charset="-78"/>
                 <a:cs typeface="Amiri" pitchFamily="2" charset="-78"/>
               </a:rPr>
               <a:t>مَا لَوْنُكَ المُفَضَّلُ؟ وَمَاذَا يَعْنِي لَكَ؟</a:t>
@@ -6199,6 +6261,7 @@
                   <a:srgbClr val="1B3B6F"/>
                 </a:solidFill>
                 <a:latin typeface="Amiri" pitchFamily="2" charset="-78"/>
+                <a:ea typeface="Amiri" pitchFamily="2" charset="-78"/>
                 <a:cs typeface="Amiri" pitchFamily="2" charset="-78"/>
               </a:rPr>
               <a:t>لَا، فَمَثَلًا … بَيْنَمَا …</a:t>
@@ -6275,6 +6338,7 @@
                   <a:srgbClr val="1B3B6F"/>
                 </a:solidFill>
                 <a:latin typeface="Amiri" pitchFamily="2" charset="-78"/>
+                <a:ea typeface="Amiri" pitchFamily="2" charset="-78"/>
                 <a:cs typeface="Amiri" pitchFamily="2" charset="-78"/>
               </a:rPr>
               <a:t>هَلْ لِلْأَلْوَانِ المَعْنَى نَفْسُهُ فِي كُلِّ الثَّقَافَاتِ؟</a:t>
@@ -6378,6 +6442,7 @@
                   <a:srgbClr val="1B3B6F"/>
                 </a:solidFill>
                 <a:latin typeface="Amiri" pitchFamily="2" charset="-78"/>
+                <a:ea typeface="Amiri" pitchFamily="2" charset="-78"/>
                 <a:cs typeface="Amiri" pitchFamily="2" charset="-78"/>
               </a:rPr>
               <a:t>صَمَّمْتُ … وَاخْتَرْتُ خَلْفِيَّةً …</a:t>
@@ -6454,6 +6519,7 @@
                   <a:srgbClr val="1B3B6F"/>
                 </a:solidFill>
                 <a:latin typeface="Amiri" pitchFamily="2" charset="-78"/>
+                <a:ea typeface="Amiri" pitchFamily="2" charset="-78"/>
                 <a:cs typeface="Amiri" pitchFamily="2" charset="-78"/>
               </a:rPr>
               <a:t>صِفْ تَصْمِيمًا عَمِلْتَهُ.</a:t>
@@ -6557,6 +6623,7 @@
                   <a:srgbClr val="1B3B6F"/>
                 </a:solidFill>
                 <a:latin typeface="Amiri" pitchFamily="2" charset="-78"/>
+                <a:ea typeface="Amiri" pitchFamily="2" charset="-78"/>
                 <a:cs typeface="Amiri" pitchFamily="2" charset="-78"/>
               </a:rPr>
               <a:t>صَحِيحٌ أَنَّ … غَيْرَ أَنَّ …</a:t>
@@ -6633,6 +6700,7 @@
                   <a:srgbClr val="1B3B6F"/>
                 </a:solidFill>
                 <a:latin typeface="Amiri" pitchFamily="2" charset="-78"/>
+                <a:ea typeface="Amiri" pitchFamily="2" charset="-78"/>
                 <a:cs typeface="Amiri" pitchFamily="2" charset="-78"/>
               </a:rPr>
               <a:t>أَلَيْسَتِ الأَلْوَانُ مَسْأَلَةَ ذَوْقٍ فَقَطْ؟</a:t>
@@ -6736,6 +6804,7 @@
                   <a:srgbClr val="1B3B6F"/>
                 </a:solidFill>
                 <a:latin typeface="Amiri" pitchFamily="2" charset="-78"/>
+                <a:ea typeface="Amiri" pitchFamily="2" charset="-78"/>
                 <a:cs typeface="Amiri" pitchFamily="2" charset="-78"/>
               </a:rPr>
               <a:t>لَوْ صَمَّمْتُ …، لَجَعَلْتُهُ …</a:t>
@@ -6812,6 +6881,7 @@
                   <a:srgbClr val="1B3B6F"/>
                 </a:solidFill>
                 <a:latin typeface="Amiri" pitchFamily="2" charset="-78"/>
+                <a:ea typeface="Amiri" pitchFamily="2" charset="-78"/>
                 <a:cs typeface="Amiri" pitchFamily="2" charset="-78"/>
               </a:rPr>
               <a:t>لَوْ صَمَّمْتَ عَلَمًا لِمَدْرَسَتِكَ، كَيْفَ يَكُونُ؟</a:t>
@@ -7021,6 +7091,7 @@
                   <a:srgbClr val="D4AF37"/>
                 </a:solidFill>
                 <a:latin typeface="Amiri" pitchFamily="2" charset="-78"/>
+                <a:ea typeface="Amiri" pitchFamily="2" charset="-78"/>
                 <a:cs typeface="Amiri" pitchFamily="2" charset="-78"/>
               </a:rPr>
               <a:t>م</a:t>
@@ -7341,6 +7412,7 @@
                   <a:srgbClr val="8A6D1E"/>
                 </a:solidFill>
                 <a:latin typeface="Amiri" pitchFamily="2" charset="-78"/>
+                <a:ea typeface="Amiri" pitchFamily="2" charset="-78"/>
                 <a:cs typeface="Amiri" pitchFamily="2" charset="-78"/>
               </a:rPr>
               <a:t>وَرَقَةُ المُلَاحِظِ</a:t>
@@ -8811,6 +8883,7 @@
                   <a:srgbClr val="D4AF37"/>
                 </a:solidFill>
                 <a:latin typeface="Amiri" pitchFamily="2" charset="-78"/>
+                <a:ea typeface="Amiri" pitchFamily="2" charset="-78"/>
                 <a:cs typeface="Amiri" pitchFamily="2" charset="-78"/>
               </a:rPr>
               <a:t>م</a:t>
@@ -9131,6 +9204,7 @@
                   <a:srgbClr val="8A6D1E"/>
                 </a:solidFill>
                 <a:latin typeface="Amiri" pitchFamily="2" charset="-78"/>
+                <a:ea typeface="Amiri" pitchFamily="2" charset="-78"/>
                 <a:cs typeface="Amiri" pitchFamily="2" charset="-78"/>
               </a:rPr>
               <a:t>نَمُوذَجُ الإِجَابَةِ</a:t>
@@ -9373,6 +9447,7 @@
                   <a:srgbClr val="1B3B6F"/>
                 </a:solidFill>
                 <a:latin typeface="Amiri" pitchFamily="2" charset="-78"/>
+                <a:ea typeface="Amiri" pitchFamily="2" charset="-78"/>
                 <a:cs typeface="Amiri" pitchFamily="2" charset="-78"/>
               </a:rPr>
               <a:t>حَقِيبَتِي لَمْ تَصِلْ مَعَ الطَّائِرَةِ مِنْ لَنْدَنَ.</a:t>
@@ -9449,6 +9524,7 @@
                   <a:srgbClr val="1B3B6F"/>
                 </a:solidFill>
                 <a:latin typeface="Amiri" pitchFamily="2" charset="-78"/>
+                <a:ea typeface="Amiri" pitchFamily="2" charset="-78"/>
                 <a:cs typeface="Amiri" pitchFamily="2" charset="-78"/>
               </a:rPr>
               <a:t>مَا المُشْكِلَةُ؟</a:t>
@@ -9552,6 +9628,7 @@
                   <a:srgbClr val="1B3B6F"/>
                 </a:solidFill>
                 <a:latin typeface="Amiri" pitchFamily="2" charset="-78"/>
+                <a:ea typeface="Amiri" pitchFamily="2" charset="-78"/>
                 <a:cs typeface="Amiri" pitchFamily="2" charset="-78"/>
               </a:rPr>
               <a:t>هِيَ زَرْقَاءُ غَامِقَةٌ، وَعَلَيْهَا شَرِيطٌ أَصْفَرُ.</a:t>
@@ -9628,6 +9705,7 @@
                   <a:srgbClr val="1B3B6F"/>
                 </a:solidFill>
                 <a:latin typeface="Amiri" pitchFamily="2" charset="-78"/>
+                <a:ea typeface="Amiri" pitchFamily="2" charset="-78"/>
                 <a:cs typeface="Amiri" pitchFamily="2" charset="-78"/>
               </a:rPr>
               <a:t>مَا لَوْنُهَا؟</a:t>
@@ -9731,6 +9809,7 @@
                   <a:srgbClr val="1B3B6F"/>
                 </a:solidFill>
                 <a:latin typeface="Amiri" pitchFamily="2" charset="-78"/>
+                <a:ea typeface="Amiri" pitchFamily="2" charset="-78"/>
                 <a:cs typeface="Amiri" pitchFamily="2" charset="-78"/>
               </a:rPr>
               <a:t>هِيَ كَبِيرَةٌ، وَمَصْنُوعَةٌ مِنَ البْلَاسْتِيكِ القَوِيِّ.</a:t>
@@ -9807,6 +9886,7 @@
                   <a:srgbClr val="1B3B6F"/>
                 </a:solidFill>
                 <a:latin typeface="Amiri" pitchFamily="2" charset="-78"/>
+                <a:ea typeface="Amiri" pitchFamily="2" charset="-78"/>
                 <a:cs typeface="Amiri" pitchFamily="2" charset="-78"/>
               </a:rPr>
               <a:t>هَلْ هِيَ كَبِيرَةٌ أَمْ صَغِيرَةٌ؟</a:t>
@@ -9910,6 +9990,7 @@
                   <a:srgbClr val="1B3B6F"/>
                 </a:solidFill>
                 <a:latin typeface="Amiri" pitchFamily="2" charset="-78"/>
+                <a:ea typeface="Amiri" pitchFamily="2" charset="-78"/>
                 <a:cs typeface="Amiri" pitchFamily="2" charset="-78"/>
               </a:rPr>
               <a:t>فِيهَا مَلَابِسِي، وَحِذَاءٌ أَسْوَدُ، وَهَدِيَّةٌ لِأُمِّي.</a:t>
@@ -9986,6 +10067,7 @@
                   <a:srgbClr val="1B3B6F"/>
                 </a:solidFill>
                 <a:latin typeface="Amiri" pitchFamily="2" charset="-78"/>
+                <a:ea typeface="Amiri" pitchFamily="2" charset="-78"/>
                 <a:cs typeface="Amiri" pitchFamily="2" charset="-78"/>
               </a:rPr>
               <a:t>مَاذَا يُوجَدُ فِيهَا؟</a:t>
@@ -10089,6 +10171,7 @@
                   <a:srgbClr val="1B3B6F"/>
                 </a:solidFill>
                 <a:latin typeface="Amiri" pitchFamily="2" charset="-78"/>
+                <a:ea typeface="Amiri" pitchFamily="2" charset="-78"/>
                 <a:cs typeface="Amiri" pitchFamily="2" charset="-78"/>
               </a:rPr>
               <a:t>أَنْزِلُ فِي فُنْدُقِ النِّيلِ، فِي وَسَطِ المَدِينَةِ.</a:t>
@@ -10165,6 +10248,7 @@
                   <a:srgbClr val="1B3B6F"/>
                 </a:solidFill>
                 <a:latin typeface="Amiri" pitchFamily="2" charset="-78"/>
+                <a:ea typeface="Amiri" pitchFamily="2" charset="-78"/>
                 <a:cs typeface="Amiri" pitchFamily="2" charset="-78"/>
               </a:rPr>
               <a:t>أَيْنَ تَنْزِلُ فِي المَدِينَةِ؟</a:t>
@@ -10374,6 +10458,7 @@
                   <a:srgbClr val="D4AF37"/>
                 </a:solidFill>
                 <a:latin typeface="Amiri" pitchFamily="2" charset="-78"/>
+                <a:ea typeface="Amiri" pitchFamily="2" charset="-78"/>
                 <a:cs typeface="Amiri" pitchFamily="2" charset="-78"/>
               </a:rPr>
               <a:t>م</a:t>
@@ -10694,6 +10779,7 @@
                   <a:srgbClr val="8A6D1E"/>
                 </a:solidFill>
                 <a:latin typeface="Amiri" pitchFamily="2" charset="-78"/>
+                <a:ea typeface="Amiri" pitchFamily="2" charset="-78"/>
                 <a:cs typeface="Amiri" pitchFamily="2" charset="-78"/>
               </a:rPr>
               <a:t>نَمُوذَجُ الإِجَابَةِ</a:t>
@@ -10936,6 +11022,7 @@
                   <a:srgbClr val="1B3B6F"/>
                 </a:solidFill>
                 <a:latin typeface="Amiri" pitchFamily="2" charset="-78"/>
+                <a:ea typeface="Amiri" pitchFamily="2" charset="-78"/>
                 <a:cs typeface="Amiri" pitchFamily="2" charset="-78"/>
               </a:rPr>
               <a:t>أُرِيدُ أَنْ أَدْهَنَ جُدْرَانَ غُرْفَتِي، وَبَابَهَا.</a:t>
@@ -11012,6 +11099,7 @@
                   <a:srgbClr val="1B3B6F"/>
                 </a:solidFill>
                 <a:latin typeface="Amiri" pitchFamily="2" charset="-78"/>
+                <a:ea typeface="Amiri" pitchFamily="2" charset="-78"/>
                 <a:cs typeface="Amiri" pitchFamily="2" charset="-78"/>
               </a:rPr>
               <a:t>مَاذَا تُرِيدُ أَنْ تَدْهَنَ؟</a:t>
@@ -11115,6 +11203,7 @@
                   <a:srgbClr val="1B3B6F"/>
                 </a:solidFill>
                 <a:latin typeface="Amiri" pitchFamily="2" charset="-78"/>
+                <a:ea typeface="Amiri" pitchFamily="2" charset="-78"/>
                 <a:cs typeface="Amiri" pitchFamily="2" charset="-78"/>
               </a:rPr>
               <a:t>أُرِيدُ لَوْنًا أَخْضَرَ فَاتِحًا، لِأَنَّهُ هَادِئٌ.</a:t>
@@ -11191,6 +11280,7 @@
                   <a:srgbClr val="1B3B6F"/>
                 </a:solidFill>
                 <a:latin typeface="Amiri" pitchFamily="2" charset="-78"/>
+                <a:ea typeface="Amiri" pitchFamily="2" charset="-78"/>
                 <a:cs typeface="Amiri" pitchFamily="2" charset="-78"/>
               </a:rPr>
               <a:t>أَيَّ لَوْنٍ لِلْجُدْرَانِ؟</a:t>
@@ -11294,6 +11384,7 @@
                   <a:srgbClr val="1B3B6F"/>
                 </a:solidFill>
                 <a:latin typeface="Amiri" pitchFamily="2" charset="-78"/>
+                <a:ea typeface="Amiri" pitchFamily="2" charset="-78"/>
                 <a:cs typeface="Amiri" pitchFamily="2" charset="-78"/>
               </a:rPr>
               <a:t>البَابُ أَبْيَضُ، لِأَنَّ الأَبْيَضَ يَجْعَلُ الغُرْفَةَ أَوْسَعَ.</a:t>
@@ -11370,6 +11461,7 @@
                   <a:srgbClr val="1B3B6F"/>
                 </a:solidFill>
                 <a:latin typeface="Amiri" pitchFamily="2" charset="-78"/>
+                <a:ea typeface="Amiri" pitchFamily="2" charset="-78"/>
                 <a:cs typeface="Amiri" pitchFamily="2" charset="-78"/>
               </a:rPr>
               <a:t>وَالبَابُ؟</a:t>
@@ -11473,6 +11565,7 @@
                   <a:srgbClr val="1B3B6F"/>
                 </a:solidFill>
                 <a:latin typeface="Amiri" pitchFamily="2" charset="-78"/>
+                <a:ea typeface="Amiri" pitchFamily="2" charset="-78"/>
                 <a:cs typeface="Amiri" pitchFamily="2" charset="-78"/>
               </a:rPr>
               <a:t>كَمْ عُلْبَةً أَحْتَاجُ لِغُرْفَةٍ صَغِيرَةٍ؟</a:t>
@@ -11549,6 +11642,7 @@
                   <a:srgbClr val="1B3B6F"/>
                 </a:solidFill>
                 <a:latin typeface="Amiri" pitchFamily="2" charset="-78"/>
+                <a:ea typeface="Amiri" pitchFamily="2" charset="-78"/>
                 <a:cs typeface="Amiri" pitchFamily="2" charset="-78"/>
               </a:rPr>
               <a:t>هٰذِهِ العُلْبَةُ بِعِشْرِينَ دِينَارًا.</a:t>
@@ -11652,6 +11746,7 @@
                   <a:srgbClr val="1B3B6F"/>
                 </a:solidFill>
                 <a:latin typeface="Amiri" pitchFamily="2" charset="-78"/>
+                <a:ea typeface="Amiri" pitchFamily="2" charset="-78"/>
                 <a:cs typeface="Amiri" pitchFamily="2" charset="-78"/>
               </a:rPr>
               <a:t>الأَثَاثُ بُنِّيٌّ، وَالسَّتَائِرُ بَيْضَاءُ، وَالسَّجَّادَةُ رَمَادِيَّةٌ.</a:t>
@@ -11728,6 +11823,7 @@
                   <a:srgbClr val="1B3B6F"/>
                 </a:solidFill>
                 <a:latin typeface="Amiri" pitchFamily="2" charset="-78"/>
+                <a:ea typeface="Amiri" pitchFamily="2" charset="-78"/>
                 <a:cs typeface="Amiri" pitchFamily="2" charset="-78"/>
               </a:rPr>
               <a:t>مَا لَوْنُ الأَثَاثِ فِي غُرْفَتِكَ؟</a:t>
@@ -11937,6 +12033,7 @@
                   <a:srgbClr val="D4AF37"/>
                 </a:solidFill>
                 <a:latin typeface="Amiri" pitchFamily="2" charset="-78"/>
+                <a:ea typeface="Amiri" pitchFamily="2" charset="-78"/>
                 <a:cs typeface="Amiri" pitchFamily="2" charset="-78"/>
               </a:rPr>
               <a:t>م</a:t>
@@ -12257,6 +12354,7 @@
                   <a:srgbClr val="8A6D1E"/>
                 </a:solidFill>
                 <a:latin typeface="Amiri" pitchFamily="2" charset="-78"/>
+                <a:ea typeface="Amiri" pitchFamily="2" charset="-78"/>
                 <a:cs typeface="Amiri" pitchFamily="2" charset="-78"/>
               </a:rPr>
               <a:t>نَمُوذَجُ الإِجَابَةِ</a:t>
@@ -12499,6 +12597,7 @@
                   <a:srgbClr val="1B3B6F"/>
                 </a:solidFill>
                 <a:latin typeface="Amiri" pitchFamily="2" charset="-78"/>
+                <a:ea typeface="Amiri" pitchFamily="2" charset="-78"/>
                 <a:cs typeface="Amiri" pitchFamily="2" charset="-78"/>
               </a:rPr>
               <a:t>أَنَا فِي مَعْرِضِ الفُنُونِ مَعَ صَفِّي، وَأَمَامِي لَوْحَةٌ رَائِعَةٌ.</a:t>
@@ -12575,6 +12674,7 @@
                   <a:srgbClr val="1B3B6F"/>
                 </a:solidFill>
                 <a:latin typeface="Amiri" pitchFamily="2" charset="-78"/>
+                <a:ea typeface="Amiri" pitchFamily="2" charset="-78"/>
                 <a:cs typeface="Amiri" pitchFamily="2" charset="-78"/>
               </a:rPr>
               <a:t>أَيْنَ أَنْتَ؟</a:t>
@@ -12678,6 +12778,7 @@
                   <a:srgbClr val="1B3B6F"/>
                 </a:solidFill>
                 <a:latin typeface="Amiri" pitchFamily="2" charset="-78"/>
+                <a:ea typeface="Amiri" pitchFamily="2" charset="-78"/>
                 <a:cs typeface="Amiri" pitchFamily="2" charset="-78"/>
               </a:rPr>
               <a:t>فِي اللَّوْحَةِ بَحْرٌ أَزْرَقُ، وَسَمَاءٌ بُرْتُقَالِيَّةٌ، وَقَوَارِبُ صَغِيرَةٌ بَيْضَاءُ.</a:t>
@@ -12754,6 +12855,7 @@
                   <a:srgbClr val="1B3B6F"/>
                 </a:solidFill>
                 <a:latin typeface="Amiri" pitchFamily="2" charset="-78"/>
+                <a:ea typeface="Amiri" pitchFamily="2" charset="-78"/>
                 <a:cs typeface="Amiri" pitchFamily="2" charset="-78"/>
               </a:rPr>
               <a:t>صِفْهَا لِي.</a:t>
@@ -12857,6 +12959,7 @@
                   <a:srgbClr val="1B3B6F"/>
                 </a:solidFill>
                 <a:latin typeface="Amiri" pitchFamily="2" charset="-78"/>
+                <a:ea typeface="Amiri" pitchFamily="2" charset="-78"/>
                 <a:cs typeface="Amiri" pitchFamily="2" charset="-78"/>
               </a:rPr>
               <a:t>عَلَى اليَمِينِ صَيَّادٌ يَلْبَسُ قُبَّعَةً حَمْرَاءَ، وَفِي الوَسَطِ أَطْفَالٌ يَلْعَبُونَ عَلَى الرَّمْلِ.</a:t>
@@ -12933,6 +13036,7 @@
                   <a:srgbClr val="1B3B6F"/>
                 </a:solidFill>
                 <a:latin typeface="Amiri" pitchFamily="2" charset="-78"/>
+                <a:ea typeface="Amiri" pitchFamily="2" charset="-78"/>
                 <a:cs typeface="Amiri" pitchFamily="2" charset="-78"/>
               </a:rPr>
               <a:t>وَأَيْنَ الأَشْخَاصُ؟</a:t>
@@ -13036,6 +13140,7 @@
                   <a:srgbClr val="1B3B6F"/>
                 </a:solidFill>
                 <a:latin typeface="Amiri" pitchFamily="2" charset="-78"/>
+                <a:ea typeface="Amiri" pitchFamily="2" charset="-78"/>
                 <a:cs typeface="Amiri" pitchFamily="2" charset="-78"/>
               </a:rPr>
               <a:t>نَعَمْ كَثِيرًا، لِأَنَّ الأَلْوَانَ دَافِئَةٌ، وَتُذَكِّرُنِي بِعُطْلَتِنَا فِي تُونِسَ.</a:t>
@@ -13112,6 +13217,7 @@
                   <a:srgbClr val="1B3B6F"/>
                 </a:solidFill>
                 <a:latin typeface="Amiri" pitchFamily="2" charset="-78"/>
+                <a:ea typeface="Amiri" pitchFamily="2" charset="-78"/>
                 <a:cs typeface="Amiri" pitchFamily="2" charset="-78"/>
               </a:rPr>
               <a:t>هَلْ تُعْجِبُكَ؟</a:t>
@@ -13215,6 +13321,7 @@
                   <a:srgbClr val="1B3B6F"/>
                 </a:solidFill>
                 <a:latin typeface="Amiri" pitchFamily="2" charset="-78"/>
+                <a:ea typeface="Amiri" pitchFamily="2" charset="-78"/>
                 <a:cs typeface="Amiri" pitchFamily="2" charset="-78"/>
               </a:rPr>
               <a:t>رَأَيْتُ تِمْثَالًا ضَخْمًا مِنَ الرُّخَامِ الأَبْيَضِ، وَكَانَتْ فِيهِ تَفَاصِيلُ دَقِيقَةٌ جِدًّا.</a:t>
@@ -13291,6 +13398,7 @@
                   <a:srgbClr val="1B3B6F"/>
                 </a:solidFill>
                 <a:latin typeface="Amiri" pitchFamily="2" charset="-78"/>
+                <a:ea typeface="Amiri" pitchFamily="2" charset="-78"/>
                 <a:cs typeface="Amiri" pitchFamily="2" charset="-78"/>
               </a:rPr>
               <a:t>مَاذَا رَأَيْتَ قَبْلَ ذٰلِكَ؟</a:t>
@@ -13500,6 +13608,7 @@
                   <a:srgbClr val="D4AF37"/>
                 </a:solidFill>
                 <a:latin typeface="Amiri" pitchFamily="2" charset="-78"/>
+                <a:ea typeface="Amiri" pitchFamily="2" charset="-78"/>
                 <a:cs typeface="Amiri" pitchFamily="2" charset="-78"/>
               </a:rPr>
               <a:t>م</a:t>
@@ -13820,6 +13929,7 @@
                   <a:srgbClr val="8A6D1E"/>
                 </a:solidFill>
                 <a:latin typeface="Amiri" pitchFamily="2" charset="-78"/>
+                <a:ea typeface="Amiri" pitchFamily="2" charset="-78"/>
                 <a:cs typeface="Amiri" pitchFamily="2" charset="-78"/>
               </a:rPr>
               <a:t>نَمُوذَجُ الإِجَابَةِ</a:t>
@@ -14062,6 +14172,7 @@
                   <a:srgbClr val="1B3B6F"/>
                 </a:solidFill>
                 <a:latin typeface="Amiri" pitchFamily="2" charset="-78"/>
+                <a:ea typeface="Amiri" pitchFamily="2" charset="-78"/>
                 <a:cs typeface="Amiri" pitchFamily="2" charset="-78"/>
               </a:rPr>
               <a:t>لَوْنِيَ المُفَضَّلُ الأَخْضَرُ، لِأَنَّهُ يُذَكِّرُنِي بِحَدِيقَةِ جَدِّي، وَيَعْنِي لِيَ الهُدُوءَ وَالحَيَاةَ.</a:t>
@@ -14138,6 +14249,7 @@
                   <a:srgbClr val="1B3B6F"/>
                 </a:solidFill>
                 <a:latin typeface="Amiri" pitchFamily="2" charset="-78"/>
+                <a:ea typeface="Amiri" pitchFamily="2" charset="-78"/>
                 <a:cs typeface="Amiri" pitchFamily="2" charset="-78"/>
               </a:rPr>
               <a:t>مَا لَوْنُكَ المُفَضَّلُ؟ وَمَاذَا يَعْنِي لَكَ؟</a:t>
@@ -14241,6 +14353,7 @@
                   <a:srgbClr val="1B3B6F"/>
                 </a:solidFill>
                 <a:latin typeface="Amiri" pitchFamily="2" charset="-78"/>
+                <a:ea typeface="Amiri" pitchFamily="2" charset="-78"/>
                 <a:cs typeface="Amiri" pitchFamily="2" charset="-78"/>
               </a:rPr>
               <a:t>لَا، فَمَثَلًا يَلْبَسُ النَّاسُ الأَبْيَضَ فِي الأَعْرَاسِ فِي أُورُوبَّا، بَيْنَمَا يَرْتَبِطُ الأَبْيَضُ بِالحُزْنِ فِي بَعْضِ بُلْدَانِ آسْيَا.</a:t>
@@ -14317,6 +14430,7 @@
                   <a:srgbClr val="1B3B6F"/>
                 </a:solidFill>
                 <a:latin typeface="Amiri" pitchFamily="2" charset="-78"/>
+                <a:ea typeface="Amiri" pitchFamily="2" charset="-78"/>
                 <a:cs typeface="Amiri" pitchFamily="2" charset="-78"/>
               </a:rPr>
               <a:t>هَلْ لِلْأَلْوَانِ المَعْنَى نَفْسُهُ فِي كُلِّ الثَّقَافَاتِ؟</a:t>
@@ -14420,6 +14534,7 @@
                   <a:srgbClr val="1B3B6F"/>
                 </a:solidFill>
                 <a:latin typeface="Amiri" pitchFamily="2" charset="-78"/>
+                <a:ea typeface="Amiri" pitchFamily="2" charset="-78"/>
                 <a:cs typeface="Amiri" pitchFamily="2" charset="-78"/>
               </a:rPr>
               <a:t>صَمَّمْتُ مُلْصَقًا لِحَمْلَةٍ بِيئِيَّةٍ، وَاخْتَرْتُ خَلْفِيَّةً خَضْرَاءَ غَامِقَةً وَكِتَابَةً صَفْرَاءَ لِتَلْفِتَ النَّظَرَ.</a:t>
@@ -14496,6 +14611,7 @@
                   <a:srgbClr val="1B3B6F"/>
                 </a:solidFill>
                 <a:latin typeface="Amiri" pitchFamily="2" charset="-78"/>
+                <a:ea typeface="Amiri" pitchFamily="2" charset="-78"/>
                 <a:cs typeface="Amiri" pitchFamily="2" charset="-78"/>
               </a:rPr>
               <a:t>صِفْ تَصْمِيمًا عَمِلْتَهُ.</a:t>
@@ -14599,6 +14715,7 @@
                   <a:srgbClr val="1B3B6F"/>
                 </a:solidFill>
                 <a:latin typeface="Amiri" pitchFamily="2" charset="-78"/>
+                <a:ea typeface="Amiri" pitchFamily="2" charset="-78"/>
                 <a:cs typeface="Amiri" pitchFamily="2" charset="-78"/>
               </a:rPr>
               <a:t>صَحِيحٌ أَنَّ الذَّوْقَ شَخْصِيٌّ، غَيْرَ أَنَّ الدِّرَاسَاتِ تُظْهِرُ أَنَّ الأَزْرَقَ يُهَدِّئُ، وَأَنَّ الأَحْمَرَ يَزِيدُ الشَّهِيَّةَ.</a:t>
@@ -14675,6 +14792,7 @@
                   <a:srgbClr val="1B3B6F"/>
                 </a:solidFill>
                 <a:latin typeface="Amiri" pitchFamily="2" charset="-78"/>
+                <a:ea typeface="Amiri" pitchFamily="2" charset="-78"/>
                 <a:cs typeface="Amiri" pitchFamily="2" charset="-78"/>
               </a:rPr>
               <a:t>أَلَيْسَتِ الأَلْوَانُ مَسْأَلَةَ ذَوْقٍ فَقَطْ؟</a:t>
@@ -14778,6 +14896,7 @@
                   <a:srgbClr val="1B3B6F"/>
                 </a:solidFill>
                 <a:latin typeface="Amiri" pitchFamily="2" charset="-78"/>
+                <a:ea typeface="Amiri" pitchFamily="2" charset="-78"/>
                 <a:cs typeface="Amiri" pitchFamily="2" charset="-78"/>
               </a:rPr>
               <a:t>لَوْ صَمَّمْتُ عَلَمًا لِمَدْرَسَتِي، لَجَعَلْتُهُ أَزْرَقَ وَذَهَبِيًّا، وَلَوَضَعْتُ فِي وَسَطِهِ كِتَابًا مَفْتُوحًا.</a:t>
@@ -14854,6 +14973,7 @@
                   <a:srgbClr val="1B3B6F"/>
                 </a:solidFill>
                 <a:latin typeface="Amiri" pitchFamily="2" charset="-78"/>
+                <a:ea typeface="Amiri" pitchFamily="2" charset="-78"/>
                 <a:cs typeface="Amiri" pitchFamily="2" charset="-78"/>
               </a:rPr>
               <a:t>لَوْ صَمَّمْتَ عَلَمًا لِمَدْرَسَتِكَ، كَيْفَ يَكُونُ؟</a:t>
@@ -15063,6 +15183,7 @@
                   <a:srgbClr val="D4AF37"/>
                 </a:solidFill>
                 <a:latin typeface="Amiri" pitchFamily="2" charset="-78"/>
+                <a:ea typeface="Amiri" pitchFamily="2" charset="-78"/>
                 <a:cs typeface="Amiri" pitchFamily="2" charset="-78"/>
               </a:rPr>
               <a:t>م</a:t>
@@ -15383,6 +15504,7 @@
                   <a:srgbClr val="8A6D1E"/>
                 </a:solidFill>
                 <a:latin typeface="Amiri" pitchFamily="2" charset="-78"/>
+                <a:ea typeface="Amiri" pitchFamily="2" charset="-78"/>
                 <a:cs typeface="Amiri" pitchFamily="2" charset="-78"/>
               </a:rPr>
               <a:t>أَلْوَانِي</a:t>
@@ -15663,6 +15785,7 @@
                   <a:srgbClr val="1B3B6F"/>
                 </a:solidFill>
                 <a:latin typeface="Amiri" pitchFamily="2" charset="-78"/>
+                <a:ea typeface="Amiri" pitchFamily="2" charset="-78"/>
                 <a:cs typeface="Amiri" pitchFamily="2" charset="-78"/>
               </a:rPr>
               <a:t>لَوْنِيَ المُفَضَّلُ …</a:t>
@@ -15739,6 +15862,7 @@
                   <a:srgbClr val="1B3B6F"/>
                 </a:solidFill>
                 <a:latin typeface="Amiri" pitchFamily="2" charset="-78"/>
+                <a:ea typeface="Amiri" pitchFamily="2" charset="-78"/>
                 <a:cs typeface="Amiri" pitchFamily="2" charset="-78"/>
               </a:rPr>
               <a:t>مَا لَوْنُكَ المُفَضَّلُ؟</a:t>
@@ -15907,6 +16031,7 @@
                   <a:srgbClr val="1B3B6F"/>
                 </a:solidFill>
                 <a:latin typeface="Amiri" pitchFamily="2" charset="-78"/>
+                <a:ea typeface="Amiri" pitchFamily="2" charset="-78"/>
                 <a:cs typeface="Amiri" pitchFamily="2" charset="-78"/>
               </a:rPr>
               <a:t>حَقِيبَتِي …</a:t>
@@ -15983,6 +16108,7 @@
                   <a:srgbClr val="1B3B6F"/>
                 </a:solidFill>
                 <a:latin typeface="Amiri" pitchFamily="2" charset="-78"/>
+                <a:ea typeface="Amiri" pitchFamily="2" charset="-78"/>
                 <a:cs typeface="Amiri" pitchFamily="2" charset="-78"/>
               </a:rPr>
               <a:t>مَا لَوْنُ حَقِيبَتِكَ المَدْرَسِيَّةِ؟</a:t>
@@ -16151,6 +16277,7 @@
                   <a:srgbClr val="1B3B6F"/>
                 </a:solidFill>
                 <a:latin typeface="Amiri" pitchFamily="2" charset="-78"/>
+                <a:ea typeface="Amiri" pitchFamily="2" charset="-78"/>
                 <a:cs typeface="Amiri" pitchFamily="2" charset="-78"/>
               </a:rPr>
               <a:t>القَمِيصُ … وَالبِنْطَالُ …</a:t>
@@ -16227,6 +16354,7 @@
                   <a:srgbClr val="1B3B6F"/>
                 </a:solidFill>
                 <a:latin typeface="Amiri" pitchFamily="2" charset="-78"/>
+                <a:ea typeface="Amiri" pitchFamily="2" charset="-78"/>
                 <a:cs typeface="Amiri" pitchFamily="2" charset="-78"/>
               </a:rPr>
               <a:t>مَا لَوْنُ الزِّيِّ المَدْرَسِيِّ؟</a:t>
@@ -16395,6 +16523,7 @@
                   <a:srgbClr val="1B3B6F"/>
                 </a:solidFill>
                 <a:latin typeface="Amiri" pitchFamily="2" charset="-78"/>
+                <a:ea typeface="Amiri" pitchFamily="2" charset="-78"/>
                 <a:cs typeface="Amiri" pitchFamily="2" charset="-78"/>
               </a:rPr>
               <a:t>سَيَّارَتُنَا … </a:t>
@@ -16471,6 +16600,7 @@
                   <a:srgbClr val="1B3B6F"/>
                 </a:solidFill>
                 <a:latin typeface="Amiri" pitchFamily="2" charset="-78"/>
+                <a:ea typeface="Amiri" pitchFamily="2" charset="-78"/>
                 <a:cs typeface="Amiri" pitchFamily="2" charset="-78"/>
               </a:rPr>
               <a:t>صِفْ سَيَّارَةَ أُسْرَتِكَ.</a:t>
@@ -16639,6 +16769,7 @@
                   <a:srgbClr val="1B3B6F"/>
                 </a:solidFill>
                 <a:latin typeface="Amiri" pitchFamily="2" charset="-78"/>
+                <a:ea typeface="Amiri" pitchFamily="2" charset="-78"/>
                 <a:cs typeface="Amiri" pitchFamily="2" charset="-78"/>
               </a:rPr>
               <a:t>فِي العَلَمِ … وَ…</a:t>
@@ -16715,6 +16846,7 @@
                   <a:srgbClr val="1B3B6F"/>
                 </a:solidFill>
                 <a:latin typeface="Amiri" pitchFamily="2" charset="-78"/>
+                <a:ea typeface="Amiri" pitchFamily="2" charset="-78"/>
                 <a:cs typeface="Amiri" pitchFamily="2" charset="-78"/>
               </a:rPr>
               <a:t>مَا الأَلْوَانُ فِي عَلَمِ بَلَدِكَ؟</a:t>
@@ -16869,6 +17001,7 @@
                   <a:srgbClr val="1B3B6F"/>
                 </a:solidFill>
                 <a:latin typeface="Amiri" pitchFamily="2" charset="-78"/>
+                <a:ea typeface="Amiri" pitchFamily="2" charset="-78"/>
                 <a:cs typeface="Amiri" pitchFamily="2" charset="-78"/>
               </a:rPr>
               <a:t>عَفْوًا، هَلْ يُمْكِنُ أَنْ تُعِيدَ السُّؤَالَ؟</a:t>
@@ -17002,6 +17135,7 @@
                   <a:srgbClr val="D4AF37"/>
                 </a:solidFill>
                 <a:latin typeface="Amiri" pitchFamily="2" charset="-78"/>
+                <a:ea typeface="Amiri" pitchFamily="2" charset="-78"/>
                 <a:cs typeface="Amiri" pitchFamily="2" charset="-78"/>
               </a:rPr>
               <a:t>م</a:t>
@@ -17322,6 +17456,7 @@
                   <a:srgbClr val="8A6D1E"/>
                 </a:solidFill>
                 <a:latin typeface="Amiri" pitchFamily="2" charset="-78"/>
+                <a:ea typeface="Amiri" pitchFamily="2" charset="-78"/>
                 <a:cs typeface="Amiri" pitchFamily="2" charset="-78"/>
               </a:rPr>
               <a:t>الوَصْفُ الدَّقِيقُ</a:t>
@@ -17602,6 +17737,7 @@
                   <a:srgbClr val="1B3B6F"/>
                 </a:solidFill>
                 <a:latin typeface="Amiri" pitchFamily="2" charset="-78"/>
+                <a:ea typeface="Amiri" pitchFamily="2" charset="-78"/>
                 <a:cs typeface="Amiri" pitchFamily="2" charset="-78"/>
               </a:rPr>
               <a:t>أَلْبَسُ … وَ… مَصْنُوعٌ مِنْ …</a:t>
@@ -17678,6 +17814,7 @@
                   <a:srgbClr val="1B3B6F"/>
                 </a:solidFill>
                 <a:latin typeface="Amiri" pitchFamily="2" charset="-78"/>
+                <a:ea typeface="Amiri" pitchFamily="2" charset="-78"/>
                 <a:cs typeface="Amiri" pitchFamily="2" charset="-78"/>
               </a:rPr>
               <a:t>صِفْ مَلَابِسَكَ اليَوْمَ بِدِقَّةٍ.</a:t>
@@ -17781,6 +17918,7 @@
                   <a:srgbClr val="1B3B6F"/>
                 </a:solidFill>
                 <a:latin typeface="Amiri" pitchFamily="2" charset="-78"/>
+                <a:ea typeface="Amiri" pitchFamily="2" charset="-78"/>
                 <a:cs typeface="Amiri" pitchFamily="2" charset="-78"/>
               </a:rPr>
               <a:t>أُحِبُّ … فِيهِ … وَ…</a:t>
@@ -17857,6 +17995,7 @@
                   <a:srgbClr val="1B3B6F"/>
                 </a:solidFill>
                 <a:latin typeface="Amiri" pitchFamily="2" charset="-78"/>
+                <a:ea typeface="Amiri" pitchFamily="2" charset="-78"/>
                 <a:cs typeface="Amiri" pitchFamily="2" charset="-78"/>
               </a:rPr>
               <a:t>صِفْ مَكَانًا تُحِبُّهُ بِأَلْوَانِهِ.</a:t>
@@ -17960,6 +18099,7 @@
                   <a:srgbClr val="1B3B6F"/>
                 </a:solidFill>
                 <a:latin typeface="Amiri" pitchFamily="2" charset="-78"/>
+                <a:ea typeface="Amiri" pitchFamily="2" charset="-78"/>
                 <a:cs typeface="Amiri" pitchFamily="2" charset="-78"/>
               </a:rPr>
               <a:t>نَعَمْ، أَخْتَارُ … لِأَنَّ … / لَا، …</a:t>
@@ -18036,6 +18176,7 @@
                   <a:srgbClr val="1B3B6F"/>
                 </a:solidFill>
                 <a:latin typeface="Amiri" pitchFamily="2" charset="-78"/>
+                <a:ea typeface="Amiri" pitchFamily="2" charset="-78"/>
                 <a:cs typeface="Amiri" pitchFamily="2" charset="-78"/>
               </a:rPr>
               <a:t>هَلْ تَخْتَارُ مَلَابِسَكَ بِسَبَبِ اللَّوْنِ؟</a:t>
@@ -18139,6 +18280,7 @@
                   <a:srgbClr val="1B3B6F"/>
                 </a:solidFill>
                 <a:latin typeface="Amiri" pitchFamily="2" charset="-78"/>
+                <a:ea typeface="Amiri" pitchFamily="2" charset="-78"/>
                 <a:cs typeface="Amiri" pitchFamily="2" charset="-78"/>
               </a:rPr>
               <a:t>أَخَذْتُ … لَوْنُهَا … وَهِيَ مَصْنُوعَةٌ مِنْ …</a:t>
@@ -18215,6 +18357,7 @@
                   <a:srgbClr val="1B3B6F"/>
                 </a:solidFill>
                 <a:latin typeface="Amiri" pitchFamily="2" charset="-78"/>
+                <a:ea typeface="Amiri" pitchFamily="2" charset="-78"/>
                 <a:cs typeface="Amiri" pitchFamily="2" charset="-78"/>
               </a:rPr>
               <a:t>صِفْ هَدِيَّةً جَمِيلَةً أَخَذْتَهَا.</a:t>
@@ -18318,6 +18461,7 @@
                   <a:srgbClr val="1B3B6F"/>
                 </a:solidFill>
                 <a:latin typeface="Amiri" pitchFamily="2" charset="-78"/>
+                <a:ea typeface="Amiri" pitchFamily="2" charset="-78"/>
                 <a:cs typeface="Amiri" pitchFamily="2" charset="-78"/>
               </a:rPr>
               <a:t>سَأَدْهَنُهَا بِاللَّوْنِ … لِأَنَّ …</a:t>
@@ -18394,6 +18538,7 @@
                   <a:srgbClr val="1B3B6F"/>
                 </a:solidFill>
                 <a:latin typeface="Amiri" pitchFamily="2" charset="-78"/>
+                <a:ea typeface="Amiri" pitchFamily="2" charset="-78"/>
                 <a:cs typeface="Amiri" pitchFamily="2" charset="-78"/>
               </a:rPr>
               <a:t>بِأَيِّ لَوْنٍ سَتَدْهَنُ غُرْفَتَكَ فِي المُسْتَقْبَلِ؟</a:t>
@@ -18603,6 +18748,7 @@
                   <a:srgbClr val="D4AF37"/>
                 </a:solidFill>
                 <a:latin typeface="Amiri" pitchFamily="2" charset="-78"/>
+                <a:ea typeface="Amiri" pitchFamily="2" charset="-78"/>
                 <a:cs typeface="Amiri" pitchFamily="2" charset="-78"/>
               </a:rPr>
               <a:t>م</a:t>
@@ -18923,6 +19069,7 @@
                   <a:srgbClr val="8A6D1E"/>
                 </a:solidFill>
                 <a:latin typeface="Amiri" pitchFamily="2" charset="-78"/>
+                <a:ea typeface="Amiri" pitchFamily="2" charset="-78"/>
                 <a:cs typeface="Amiri" pitchFamily="2" charset="-78"/>
               </a:rPr>
               <a:t>الأَلْوَانُ وَالحَيَاةُ</a:t>
@@ -19203,6 +19350,7 @@
                   <a:srgbClr val="1B3B6F"/>
                 </a:solidFill>
                 <a:latin typeface="Amiri" pitchFamily="2" charset="-78"/>
+                <a:ea typeface="Amiri" pitchFamily="2" charset="-78"/>
                 <a:cs typeface="Amiri" pitchFamily="2" charset="-78"/>
               </a:rPr>
               <a:t>نَعَمْ، فَالأَزْرَقُ مَثَلًا … أَمَّا الأَحْمَرُ فَيُشْعِرُنِي …</a:t>
@@ -19279,6 +19427,7 @@
                   <a:srgbClr val="1B3B6F"/>
                 </a:solidFill>
                 <a:latin typeface="Amiri" pitchFamily="2" charset="-78"/>
+                <a:ea typeface="Amiri" pitchFamily="2" charset="-78"/>
                 <a:cs typeface="Amiri" pitchFamily="2" charset="-78"/>
               </a:rPr>
               <a:t>هَلْ تُؤَثِّرُ الأَلْوَانُ فِي مَشَاعِرِنَا؟</a:t>
@@ -19382,6 +19531,7 @@
                   <a:srgbClr val="1B3B6F"/>
                 </a:solidFill>
                 <a:latin typeface="Amiri" pitchFamily="2" charset="-78"/>
+                <a:ea typeface="Amiri" pitchFamily="2" charset="-78"/>
                 <a:cs typeface="Amiri" pitchFamily="2" charset="-78"/>
               </a:rPr>
               <a:t>لِأَنَّ … مَثَلًا عِنْدَمَا …</a:t>
@@ -19458,6 +19608,7 @@
                   <a:srgbClr val="1B3B6F"/>
                 </a:solidFill>
                 <a:latin typeface="Amiri" pitchFamily="2" charset="-78"/>
+                <a:ea typeface="Amiri" pitchFamily="2" charset="-78"/>
                 <a:cs typeface="Amiri" pitchFamily="2" charset="-78"/>
               </a:rPr>
               <a:t>لِمَاذَا تُعْتَبَرُ الدِّقَّةُ فِي الوَصْفِ مُهِمَّةً؟</a:t>
@@ -19561,6 +19712,7 @@
                   <a:srgbClr val="1B3B6F"/>
                 </a:solidFill>
                 <a:latin typeface="Amiri" pitchFamily="2" charset="-78"/>
+                <a:ea typeface="Amiri" pitchFamily="2" charset="-78"/>
                 <a:cs typeface="Amiri" pitchFamily="2" charset="-78"/>
               </a:rPr>
               <a:t>صَحِيحٌ أَنَّ … غَيْرَ أَنَّ …</a:t>
@@ -19637,6 +19789,7 @@
                   <a:srgbClr val="1B3B6F"/>
                 </a:solidFill>
                 <a:latin typeface="Amiri" pitchFamily="2" charset="-78"/>
+                <a:ea typeface="Amiri" pitchFamily="2" charset="-78"/>
                 <a:cs typeface="Amiri" pitchFamily="2" charset="-78"/>
               </a:rPr>
               <a:t>هَلِ المُدُنُ الحَدِيثَةُ أَقَلُّ أَلْوَانًا مِنَ القَدِيمَةِ؟</a:t>
@@ -19740,6 +19893,7 @@
                   <a:srgbClr val="1B3B6F"/>
                 </a:solidFill>
                 <a:latin typeface="Amiri" pitchFamily="2" charset="-78"/>
+                <a:ea typeface="Amiri" pitchFamily="2" charset="-78"/>
                 <a:cs typeface="Amiri" pitchFamily="2" charset="-78"/>
               </a:rPr>
               <a:t>رَأَيْتُ … كَانَتِ السَّمَاءُ … وَ…</a:t>
@@ -19816,6 +19970,7 @@
                   <a:srgbClr val="1B3B6F"/>
                 </a:solidFill>
                 <a:latin typeface="Amiri" pitchFamily="2" charset="-78"/>
+                <a:ea typeface="Amiri" pitchFamily="2" charset="-78"/>
                 <a:cs typeface="Amiri" pitchFamily="2" charset="-78"/>
               </a:rPr>
               <a:t>صِفْ مَنْظَرًا طَبِيعِيًّا لَا تَنْسَاهُ.</a:t>
@@ -19919,6 +20074,7 @@
                   <a:srgbClr val="1B3B6F"/>
                 </a:solidFill>
                 <a:latin typeface="Amiri" pitchFamily="2" charset="-78"/>
+                <a:ea typeface="Amiri" pitchFamily="2" charset="-78"/>
                 <a:cs typeface="Amiri" pitchFamily="2" charset="-78"/>
               </a:rPr>
               <a:t>لَوْ عِشْتُ …، لَافْتَقَدْتُ …</a:t>
@@ -19995,6 +20151,7 @@
                   <a:srgbClr val="1B3B6F"/>
                 </a:solidFill>
                 <a:latin typeface="Amiri" pitchFamily="2" charset="-78"/>
+                <a:ea typeface="Amiri" pitchFamily="2" charset="-78"/>
                 <a:cs typeface="Amiri" pitchFamily="2" charset="-78"/>
               </a:rPr>
               <a:t>لَوْ عِشْتَ فِي عَالَمٍ بِلَا أَلْوَانٍ، مَاذَا تَفْتَقِدُ أَكْثَرَ؟</a:t>
@@ -20204,6 +20361,7 @@
                   <a:srgbClr val="D4AF37"/>
                 </a:solidFill>
                 <a:latin typeface="Amiri" pitchFamily="2" charset="-78"/>
+                <a:ea typeface="Amiri" pitchFamily="2" charset="-78"/>
                 <a:cs typeface="Amiri" pitchFamily="2" charset="-78"/>
               </a:rPr>
               <a:t>م</a:t>
@@ -20524,6 +20682,7 @@
                   <a:srgbClr val="8A6D1E"/>
                 </a:solidFill>
                 <a:latin typeface="Amiri" pitchFamily="2" charset="-78"/>
+                <a:ea typeface="Amiri" pitchFamily="2" charset="-78"/>
                 <a:cs typeface="Amiri" pitchFamily="2" charset="-78"/>
               </a:rPr>
               <a:t>آدَابُ الصَّفِّ</a:t>
@@ -22055,6 +22214,7 @@
                   <a:srgbClr val="D4AF37"/>
                 </a:solidFill>
                 <a:latin typeface="Amiri" pitchFamily="2" charset="-78"/>
+                <a:ea typeface="Amiri" pitchFamily="2" charset="-78"/>
                 <a:cs typeface="Amiri" pitchFamily="2" charset="-78"/>
               </a:rPr>
               <a:t>م</a:t>
@@ -22375,6 +22535,7 @@
                   <a:srgbClr val="8A6D1E"/>
                 </a:solidFill>
                 <a:latin typeface="Amiri" pitchFamily="2" charset="-78"/>
+                <a:ea typeface="Amiri" pitchFamily="2" charset="-78"/>
                 <a:cs typeface="Amiri" pitchFamily="2" charset="-78"/>
               </a:rPr>
               <a:t>نَمُوذَجُ الإِجَابَةِ</a:t>
@@ -22617,6 +22778,7 @@
                   <a:srgbClr val="1B3B6F"/>
                 </a:solidFill>
                 <a:latin typeface="Amiri" pitchFamily="2" charset="-78"/>
+                <a:ea typeface="Amiri" pitchFamily="2" charset="-78"/>
                 <a:cs typeface="Amiri" pitchFamily="2" charset="-78"/>
               </a:rPr>
               <a:t>لَوْنِيَ المُفَضَّلُ الأَزْرَقُ، مِثْلَ لَوْنِ البَحْرِ.</a:t>
@@ -22693,6 +22855,7 @@
                   <a:srgbClr val="1B3B6F"/>
                 </a:solidFill>
                 <a:latin typeface="Amiri" pitchFamily="2" charset="-78"/>
+                <a:ea typeface="Amiri" pitchFamily="2" charset="-78"/>
                 <a:cs typeface="Amiri" pitchFamily="2" charset="-78"/>
               </a:rPr>
               <a:t>مَا لَوْنُكَ المُفَضَّلُ؟</a:t>
@@ -22796,6 +22959,7 @@
                   <a:srgbClr val="1B3B6F"/>
                 </a:solidFill>
                 <a:latin typeface="Amiri" pitchFamily="2" charset="-78"/>
+                <a:ea typeface="Amiri" pitchFamily="2" charset="-78"/>
                 <a:cs typeface="Amiri" pitchFamily="2" charset="-78"/>
               </a:rPr>
               <a:t>حَقِيبَتِي سَوْدَاءُ وَرَمَادِيَّةٌ.</a:t>
@@ -22872,6 +23036,7 @@
                   <a:srgbClr val="1B3B6F"/>
                 </a:solidFill>
                 <a:latin typeface="Amiri" pitchFamily="2" charset="-78"/>
+                <a:ea typeface="Amiri" pitchFamily="2" charset="-78"/>
                 <a:cs typeface="Amiri" pitchFamily="2" charset="-78"/>
               </a:rPr>
               <a:t>مَا لَوْنُ حَقِيبَتِكَ المَدْرَسِيَّةِ؟</a:t>
@@ -22975,6 +23140,7 @@
                   <a:srgbClr val="1B3B6F"/>
                 </a:solidFill>
                 <a:latin typeface="Amiri" pitchFamily="2" charset="-78"/>
+                <a:ea typeface="Amiri" pitchFamily="2" charset="-78"/>
                 <a:cs typeface="Amiri" pitchFamily="2" charset="-78"/>
               </a:rPr>
               <a:t>القَمِيصُ أَبْيَضُ، وَالبِنْطَالُ أَزْرَقُ غَامِقٌ.</a:t>
@@ -23051,6 +23217,7 @@
                   <a:srgbClr val="1B3B6F"/>
                 </a:solidFill>
                 <a:latin typeface="Amiri" pitchFamily="2" charset="-78"/>
+                <a:ea typeface="Amiri" pitchFamily="2" charset="-78"/>
                 <a:cs typeface="Amiri" pitchFamily="2" charset="-78"/>
               </a:rPr>
               <a:t>مَا لَوْنُ الزِّيِّ المَدْرَسِيِّ؟</a:t>
@@ -23154,6 +23321,7 @@
                   <a:srgbClr val="1B3B6F"/>
                 </a:solidFill>
                 <a:latin typeface="Amiri" pitchFamily="2" charset="-78"/>
+                <a:ea typeface="Amiri" pitchFamily="2" charset="-78"/>
                 <a:cs typeface="Amiri" pitchFamily="2" charset="-78"/>
               </a:rPr>
               <a:t>سَيَّارَتُنَا كَبِيرَةٌ وَحَمْرَاءُ، وَهِيَ قَدِيمَةٌ قَلِيلًا.</a:t>
@@ -23230,6 +23398,7 @@
                   <a:srgbClr val="1B3B6F"/>
                 </a:solidFill>
                 <a:latin typeface="Amiri" pitchFamily="2" charset="-78"/>
+                <a:ea typeface="Amiri" pitchFamily="2" charset="-78"/>
                 <a:cs typeface="Amiri" pitchFamily="2" charset="-78"/>
               </a:rPr>
               <a:t>صِفْ سَيَّارَةَ أُسْرَتِكَ.</a:t>
@@ -23333,6 +23502,7 @@
                   <a:srgbClr val="1B3B6F"/>
                 </a:solidFill>
                 <a:latin typeface="Amiri" pitchFamily="2" charset="-78"/>
+                <a:ea typeface="Amiri" pitchFamily="2" charset="-78"/>
                 <a:cs typeface="Amiri" pitchFamily="2" charset="-78"/>
               </a:rPr>
               <a:t>فِي العَلَمِ البِرِيطَانِيِّ أَحْمَرُ وَأَبْيَضُ وَأَزْرَقُ.</a:t>
@@ -23409,6 +23579,7 @@
                   <a:srgbClr val="1B3B6F"/>
                 </a:solidFill>
                 <a:latin typeface="Amiri" pitchFamily="2" charset="-78"/>
+                <a:ea typeface="Amiri" pitchFamily="2" charset="-78"/>
                 <a:cs typeface="Amiri" pitchFamily="2" charset="-78"/>
               </a:rPr>
               <a:t>مَا الأَلْوَانُ فِي عَلَمِ بَلَدِكَ؟</a:t>
@@ -23618,6 +23789,7 @@
                   <a:srgbClr val="D4AF37"/>
                 </a:solidFill>
                 <a:latin typeface="Amiri" pitchFamily="2" charset="-78"/>
+                <a:ea typeface="Amiri" pitchFamily="2" charset="-78"/>
                 <a:cs typeface="Amiri" pitchFamily="2" charset="-78"/>
               </a:rPr>
               <a:t>م</a:t>
@@ -23938,6 +24110,7 @@
                   <a:srgbClr val="8A6D1E"/>
                 </a:solidFill>
                 <a:latin typeface="Amiri" pitchFamily="2" charset="-78"/>
+                <a:ea typeface="Amiri" pitchFamily="2" charset="-78"/>
                 <a:cs typeface="Amiri" pitchFamily="2" charset="-78"/>
               </a:rPr>
               <a:t>نَمُوذَجُ الإِجَابَةِ</a:t>
@@ -24180,6 +24353,7 @@
                   <a:srgbClr val="1B3B6F"/>
                 </a:solidFill>
                 <a:latin typeface="Amiri" pitchFamily="2" charset="-78"/>
+                <a:ea typeface="Amiri" pitchFamily="2" charset="-78"/>
                 <a:cs typeface="Amiri" pitchFamily="2" charset="-78"/>
               </a:rPr>
               <a:t>أَلْبَسُ قَمِيصًا أَزْرَقَ فَاتِحًا مُخَطَّطًا، وَبِنْطَالًا رَمَادِيًّا مَصْنُوعًا مِنَ القُطْنِ.</a:t>
@@ -24256,6 +24430,7 @@
                   <a:srgbClr val="1B3B6F"/>
                 </a:solidFill>
                 <a:latin typeface="Amiri" pitchFamily="2" charset="-78"/>
+                <a:ea typeface="Amiri" pitchFamily="2" charset="-78"/>
                 <a:cs typeface="Amiri" pitchFamily="2" charset="-78"/>
               </a:rPr>
               <a:t>صِفْ مَلَابِسَكَ اليَوْمَ بِدِقَّةٍ.</a:t>
@@ -24359,6 +24534,7 @@
                   <a:srgbClr val="1B3B6F"/>
                 </a:solidFill>
                 <a:latin typeface="Amiri" pitchFamily="2" charset="-78"/>
+                <a:ea typeface="Amiri" pitchFamily="2" charset="-78"/>
                 <a:cs typeface="Amiri" pitchFamily="2" charset="-78"/>
               </a:rPr>
               <a:t>أُحِبُّ سُوقَ التَّوَابِلِ فِي القُدْسِ، فِيهِ أَكْيَاسٌ حَمْرَاءُ وَصَفْرَاءُ وَبُرْتُقَالِيَّةٌ، وَرَائِحَتُهُ رَائِعَةٌ.</a:t>
@@ -24435,6 +24611,7 @@
                   <a:srgbClr val="1B3B6F"/>
                 </a:solidFill>
                 <a:latin typeface="Amiri" pitchFamily="2" charset="-78"/>
+                <a:ea typeface="Amiri" pitchFamily="2" charset="-78"/>
                 <a:cs typeface="Amiri" pitchFamily="2" charset="-78"/>
               </a:rPr>
               <a:t>صِفْ مَكَانًا تُحِبُّهُ بِأَلْوَانِهِ.</a:t>
@@ -24538,6 +24715,7 @@
                   <a:srgbClr val="1B3B6F"/>
                 </a:solidFill>
                 <a:latin typeface="Amiri" pitchFamily="2" charset="-78"/>
+                <a:ea typeface="Amiri" pitchFamily="2" charset="-78"/>
                 <a:cs typeface="Amiri" pitchFamily="2" charset="-78"/>
               </a:rPr>
               <a:t>نَعَمْ، أَخْتَارُ الأَلْوَانَ الغَامِقَةَ فِي الشِّتَاءِ، وَالأَلْوَانَ الفَاتِحَةَ فِي الصَّيْفِ، لِأَنَّهَا أَبْرَدُ.</a:t>
@@ -24614,6 +24792,7 @@
                   <a:srgbClr val="1B3B6F"/>
                 </a:solidFill>
                 <a:latin typeface="Amiri" pitchFamily="2" charset="-78"/>
+                <a:ea typeface="Amiri" pitchFamily="2" charset="-78"/>
                 <a:cs typeface="Amiri" pitchFamily="2" charset="-78"/>
               </a:rPr>
               <a:t>هَلْ تَخْتَارُ مَلَابِسَكَ بِسَبَبِ اللَّوْنِ؟</a:t>
@@ -24717,6 +24896,7 @@
                   <a:srgbClr val="1B3B6F"/>
                 </a:solidFill>
                 <a:latin typeface="Amiri" pitchFamily="2" charset="-78"/>
+                <a:ea typeface="Amiri" pitchFamily="2" charset="-78"/>
                 <a:cs typeface="Amiri" pitchFamily="2" charset="-78"/>
               </a:rPr>
               <a:t>أَخَذْتُ مِنْ خَالَتِي سَاعَةً فِضِّيَّةً، وَهِيَ مَصْنُوعَةٌ مِنَ المَعْدِنِ، وَفِيهَا أَرْقَامٌ عَرَبِيَّةٌ.</a:t>
@@ -24793,6 +24973,7 @@
                   <a:srgbClr val="1B3B6F"/>
                 </a:solidFill>
                 <a:latin typeface="Amiri" pitchFamily="2" charset="-78"/>
+                <a:ea typeface="Amiri" pitchFamily="2" charset="-78"/>
                 <a:cs typeface="Amiri" pitchFamily="2" charset="-78"/>
               </a:rPr>
               <a:t>صِفْ هَدِيَّةً جَمِيلَةً أَخَذْتَهَا.</a:t>
@@ -24896,6 +25077,7 @@
                   <a:srgbClr val="1B3B6F"/>
                 </a:solidFill>
                 <a:latin typeface="Amiri" pitchFamily="2" charset="-78"/>
+                <a:ea typeface="Amiri" pitchFamily="2" charset="-78"/>
                 <a:cs typeface="Amiri" pitchFamily="2" charset="-78"/>
               </a:rPr>
               <a:t>سَأَدْهَنُهَا بِاللَّوْنِ الأَصْفَرِ الفَاتِحِ، لِأَنَّهُ يَجْعَلُ الغُرْفَةَ مُشْرِقَةً حَتَّى فِي الشِّتَاءِ.</a:t>
@@ -24972,6 +25154,7 @@
                   <a:srgbClr val="1B3B6F"/>
                 </a:solidFill>
                 <a:latin typeface="Amiri" pitchFamily="2" charset="-78"/>
+                <a:ea typeface="Amiri" pitchFamily="2" charset="-78"/>
                 <a:cs typeface="Amiri" pitchFamily="2" charset="-78"/>
               </a:rPr>
               <a:t>بِأَيِّ لَوْنٍ سَتَدْهَنُ غُرْفَتَكَ فِي المُسْتَقْبَلِ؟</a:t>
@@ -25181,6 +25364,7 @@
                   <a:srgbClr val="D4AF37"/>
                 </a:solidFill>
                 <a:latin typeface="Amiri" pitchFamily="2" charset="-78"/>
+                <a:ea typeface="Amiri" pitchFamily="2" charset="-78"/>
                 <a:cs typeface="Amiri" pitchFamily="2" charset="-78"/>
               </a:rPr>
               <a:t>م</a:t>
@@ -25501,6 +25685,7 @@
                   <a:srgbClr val="8A6D1E"/>
                 </a:solidFill>
                 <a:latin typeface="Amiri" pitchFamily="2" charset="-78"/>
+                <a:ea typeface="Amiri" pitchFamily="2" charset="-78"/>
                 <a:cs typeface="Amiri" pitchFamily="2" charset="-78"/>
               </a:rPr>
               <a:t>نَمُوذَجُ الإِجَابَةِ</a:t>
@@ -25743,6 +25928,7 @@
                   <a:srgbClr val="1B3B6F"/>
                 </a:solidFill>
                 <a:latin typeface="Amiri" pitchFamily="2" charset="-78"/>
+                <a:ea typeface="Amiri" pitchFamily="2" charset="-78"/>
                 <a:cs typeface="Amiri" pitchFamily="2" charset="-78"/>
               </a:rPr>
               <a:t>نَعَمْ، فَالأَزْرَقُ مَثَلًا يُشْعِرُنِي بِالهُدُوءِ، أَمَّا الأَحْمَرُ فَيُشْعِرُنِي بِالحَمَاسِ، وَلِذٰلِكَ تَخْتَارُهُ المَطَاعِمُ.</a:t>
@@ -25819,6 +26005,7 @@
                   <a:srgbClr val="1B3B6F"/>
                 </a:solidFill>
                 <a:latin typeface="Amiri" pitchFamily="2" charset="-78"/>
+                <a:ea typeface="Amiri" pitchFamily="2" charset="-78"/>
                 <a:cs typeface="Amiri" pitchFamily="2" charset="-78"/>
               </a:rPr>
               <a:t>هَلْ تُؤَثِّرُ الأَلْوَانُ فِي مَشَاعِرِنَا؟</a:t>
@@ -25922,6 +26109,7 @@
                   <a:srgbClr val="1B3B6F"/>
                 </a:solidFill>
                 <a:latin typeface="Amiri" pitchFamily="2" charset="-78"/>
+                <a:ea typeface="Amiri" pitchFamily="2" charset="-78"/>
                 <a:cs typeface="Amiri" pitchFamily="2" charset="-78"/>
               </a:rPr>
               <a:t>لِأَنَّ الوَصْفَ الدَّقِيقَ يُسَاعِدُ الآخَرِينَ، مَثَلًا عِنْدَمَا يَضِيعُ طِفْلٌ، تَحْتَاجُ الشُّرْطَةُ إِلَى لَوْنِ مَلَابِسِهِ بِالضَّبْطِ.</a:t>
@@ -25998,6 +26186,7 @@
                   <a:srgbClr val="1B3B6F"/>
                 </a:solidFill>
                 <a:latin typeface="Amiri" pitchFamily="2" charset="-78"/>
+                <a:ea typeface="Amiri" pitchFamily="2" charset="-78"/>
                 <a:cs typeface="Amiri" pitchFamily="2" charset="-78"/>
               </a:rPr>
               <a:t>لِمَاذَا تُعْتَبَرُ الدِّقَّةُ فِي الوَصْفِ مُهِمَّةً؟</a:t>
@@ -26101,6 +26290,7 @@
                   <a:srgbClr val="1B3B6F"/>
                 </a:solidFill>
                 <a:latin typeface="Amiri" pitchFamily="2" charset="-78"/>
+                <a:ea typeface="Amiri" pitchFamily="2" charset="-78"/>
                 <a:cs typeface="Amiri" pitchFamily="2" charset="-78"/>
               </a:rPr>
               <a:t>صَحِيحٌ أَنَّ المَبَانِيَ الحَدِيثَةَ رَمَادِيَّةٌ فِي الغَالِبِ، غَيْرَ أَنَّ بَعْضَ المُدُنِ تَرْسُمُ لَوْحَاتٍ مُلَوَّنَةً عَلَى جُدْرَانِهَا.</a:t>
@@ -26177,6 +26367,7 @@
                   <a:srgbClr val="1B3B6F"/>
                 </a:solidFill>
                 <a:latin typeface="Amiri" pitchFamily="2" charset="-78"/>
+                <a:ea typeface="Amiri" pitchFamily="2" charset="-78"/>
                 <a:cs typeface="Amiri" pitchFamily="2" charset="-78"/>
               </a:rPr>
               <a:t>هَلِ المُدُنُ الحَدِيثَةُ أَقَلُّ أَلْوَانًا مِنَ القَدِيمَةِ؟</a:t>
@@ -26386,6 +26577,7 @@
                   <a:srgbClr val="D4AF37"/>
                 </a:solidFill>
                 <a:latin typeface="Amiri" pitchFamily="2" charset="-78"/>
+                <a:ea typeface="Amiri" pitchFamily="2" charset="-78"/>
                 <a:cs typeface="Amiri" pitchFamily="2" charset="-78"/>
               </a:rPr>
               <a:t>م</a:t>
@@ -26706,6 +26898,7 @@
                   <a:srgbClr val="8A6D1E"/>
                 </a:solidFill>
                 <a:latin typeface="Amiri" pitchFamily="2" charset="-78"/>
+                <a:ea typeface="Amiri" pitchFamily="2" charset="-78"/>
                 <a:cs typeface="Amiri" pitchFamily="2" charset="-78"/>
               </a:rPr>
               <a:t>نَمُوذَجُ الإِجَابَةِ</a:t>
@@ -26948,6 +27141,7 @@
                   <a:srgbClr val="1B3B6F"/>
                 </a:solidFill>
                 <a:latin typeface="Amiri" pitchFamily="2" charset="-78"/>
+                <a:ea typeface="Amiri" pitchFamily="2" charset="-78"/>
                 <a:cs typeface="Amiri" pitchFamily="2" charset="-78"/>
               </a:rPr>
               <a:t>رَأَيْتُ غُرُوبَ الشَّمْسِ فِي الصَّحْرَاءِ؛ كَانَتِ السَّمَاءُ حَمْرَاءَ ثُمَّ بَنَفْسَجِيَّةً، وَالرِّمَالُ ذَهَبِيَّةً.</a:t>
@@ -27024,6 +27218,7 @@
                   <a:srgbClr val="1B3B6F"/>
                 </a:solidFill>
                 <a:latin typeface="Amiri" pitchFamily="2" charset="-78"/>
+                <a:ea typeface="Amiri" pitchFamily="2" charset="-78"/>
                 <a:cs typeface="Amiri" pitchFamily="2" charset="-78"/>
               </a:rPr>
               <a:t>صِفْ مَنْظَرًا طَبِيعِيًّا لَا تَنْسَاهُ.</a:t>
@@ -27127,6 +27322,7 @@
                   <a:srgbClr val="1B3B6F"/>
                 </a:solidFill>
                 <a:latin typeface="Amiri" pitchFamily="2" charset="-78"/>
+                <a:ea typeface="Amiri" pitchFamily="2" charset="-78"/>
                 <a:cs typeface="Amiri" pitchFamily="2" charset="-78"/>
               </a:rPr>
               <a:t>لَوْ عِشْتُ فِي عَالَمٍ بِلَا أَلْوَانٍ، لَافْتَقَدْتُ خُضْرَةَ الأَشْجَارِ فِي الرَّبِيعِ أَكْثَرَ مِنْ أَيِّ شَيْءٍ.</a:t>
@@ -27206,6 +27402,7 @@
                   <a:srgbClr val="1B3B6F"/>
                 </a:solidFill>
                 <a:latin typeface="Amiri" pitchFamily="2" charset="-78"/>
+                <a:ea typeface="Amiri" pitchFamily="2" charset="-78"/>
                 <a:cs typeface="Amiri" pitchFamily="2" charset="-78"/>
               </a:rPr>
               <a:t>لَوْ عِشْتَ فِي عَالَمٍ بِلَا أَلْوَانٍ، مَاذَا تَفْتَقِدُ أَكْثَرَ؟</a:t>
@@ -27415,6 +27612,7 @@
                   <a:srgbClr val="D4AF37"/>
                 </a:solidFill>
                 <a:latin typeface="Amiri" pitchFamily="2" charset="-78"/>
+                <a:ea typeface="Amiri" pitchFamily="2" charset="-78"/>
                 <a:cs typeface="Amiri" pitchFamily="2" charset="-78"/>
               </a:rPr>
               <a:t>م</a:t>
@@ -27735,6 +27933,7 @@
                   <a:srgbClr val="8A6D1E"/>
                 </a:solidFill>
                 <a:latin typeface="Amiri" pitchFamily="2" charset="-78"/>
+                <a:ea typeface="Amiri" pitchFamily="2" charset="-78"/>
                 <a:cs typeface="Amiri" pitchFamily="2" charset="-78"/>
               </a:rPr>
               <a:t>قَيِّمْ عَمَلَكَ</a:t>
@@ -28979,6 +29178,7 @@
                   <a:srgbClr val="FFFFFF"/>
                 </a:solidFill>
                 <a:latin typeface="Amiri" pitchFamily="2" charset="-78"/>
+                <a:ea typeface="Amiri" pitchFamily="2" charset="-78"/>
                 <a:cs typeface="Amiri" pitchFamily="2" charset="-78"/>
               </a:rPr>
               <a:t>أَحْسَنْتُمْ! إِلَى اللِّقَاءِ</a:t>
@@ -29131,6 +29331,7 @@
                   <a:srgbClr val="D4AF37"/>
                 </a:solidFill>
                 <a:latin typeface="Amiri" pitchFamily="2" charset="-78"/>
+                <a:ea typeface="Amiri" pitchFamily="2" charset="-78"/>
                 <a:cs typeface="Amiri" pitchFamily="2" charset="-78"/>
               </a:rPr>
               <a:t>وَرْشَةُ الكِتَابَةِ</a:t>
@@ -29264,6 +29465,7 @@
                   <a:srgbClr val="D4AF37"/>
                 </a:solidFill>
                 <a:latin typeface="Amiri" pitchFamily="2" charset="-78"/>
+                <a:ea typeface="Amiri" pitchFamily="2" charset="-78"/>
                 <a:cs typeface="Amiri" pitchFamily="2" charset="-78"/>
               </a:rPr>
               <a:t>م</a:t>
@@ -29584,6 +29786,7 @@
                   <a:srgbClr val="8A6D1E"/>
                 </a:solidFill>
                 <a:latin typeface="Amiri" pitchFamily="2" charset="-78"/>
+                <a:ea typeface="Amiri" pitchFamily="2" charset="-78"/>
                 <a:cs typeface="Amiri" pitchFamily="2" charset="-78"/>
               </a:rPr>
               <a:t>خَرِيطَةُ الوَرْشَةِ</a:t>
@@ -29898,6 +30101,7 @@
                   <a:srgbClr val="1B3B6F"/>
                 </a:solidFill>
                 <a:latin typeface="Amiri" pitchFamily="2" charset="-78"/>
+                <a:ea typeface="Amiri" pitchFamily="2" charset="-78"/>
                 <a:cs typeface="Amiri" pitchFamily="2" charset="-78"/>
               </a:rPr>
               <a:t>كَيْفَ</a:t>
@@ -30174,6 +30378,7 @@
                   <a:srgbClr val="1E6B52"/>
                 </a:solidFill>
                 <a:latin typeface="Amiri" pitchFamily="2" charset="-78"/>
+                <a:ea typeface="Amiri" pitchFamily="2" charset="-78"/>
                 <a:cs typeface="Amiri" pitchFamily="2" charset="-78"/>
               </a:rPr>
               <a:t>تَمْثِيلُ الدَّوْرِ</a:t>
@@ -30450,6 +30655,7 @@
                   <a:srgbClr val="8A6D1E"/>
                 </a:solidFill>
                 <a:latin typeface="Amiri" pitchFamily="2" charset="-78"/>
+                <a:ea typeface="Amiri" pitchFamily="2" charset="-78"/>
                 <a:cs typeface="Amiri" pitchFamily="2" charset="-78"/>
               </a:rPr>
               <a:t>النَّمُوذَجُ</a:t>
@@ -30726,6 +30932,7 @@
                   <a:srgbClr val="1E6B52"/>
                 </a:solidFill>
                 <a:latin typeface="Amiri" pitchFamily="2" charset="-78"/>
+                <a:ea typeface="Amiri" pitchFamily="2" charset="-78"/>
                 <a:cs typeface="Amiri" pitchFamily="2" charset="-78"/>
               </a:rPr>
               <a:t>المُحَادَثَةُ</a:t>
@@ -31002,6 +31209,7 @@
                   <a:srgbClr val="8A6D1E"/>
                 </a:solidFill>
                 <a:latin typeface="Amiri" pitchFamily="2" charset="-78"/>
+                <a:ea typeface="Amiri" pitchFamily="2" charset="-78"/>
                 <a:cs typeface="Amiri" pitchFamily="2" charset="-78"/>
               </a:rPr>
               <a:t>قَيِّمْ</a:t>
@@ -31245,6 +31453,7 @@
                   <a:srgbClr val="D4AF37"/>
                 </a:solidFill>
                 <a:latin typeface="Amiri" pitchFamily="2" charset="-78"/>
+                <a:ea typeface="Amiri" pitchFamily="2" charset="-78"/>
                 <a:cs typeface="Amiri" pitchFamily="2" charset="-78"/>
               </a:rPr>
               <a:t>م</a:t>
@@ -31565,6 +31774,7 @@
                   <a:srgbClr val="8A6D1E"/>
                 </a:solidFill>
                 <a:latin typeface="Amiri" pitchFamily="2" charset="-78"/>
+                <a:ea typeface="Amiri" pitchFamily="2" charset="-78"/>
                 <a:cs typeface="Amiri" pitchFamily="2" charset="-78"/>
               </a:rPr>
               <a:t>امْتِحَانُ التَّحَدُّثِ</a:t>
@@ -32189,6 +32399,7 @@
                   <a:srgbClr val="1B3B6F"/>
                 </a:solidFill>
                 <a:latin typeface="Amiri" pitchFamily="2" charset="-78"/>
+                <a:ea typeface="Amiri" pitchFamily="2" charset="-78"/>
                 <a:cs typeface="Amiri" pitchFamily="2" charset="-78"/>
               </a:rPr>
               <a:t>عَفْوًا، هَلْ يُمْكِنُ أَنْ تُعِيدَ السُّؤَالَ؟</a:t>
@@ -32288,6 +32499,7 @@
                   <a:srgbClr val="1B3B6F"/>
                 </a:solidFill>
                 <a:latin typeface="Amiri" pitchFamily="2" charset="-78"/>
+                <a:ea typeface="Amiri" pitchFamily="2" charset="-78"/>
                 <a:cs typeface="Amiri" pitchFamily="2" charset="-78"/>
               </a:rPr>
               <a:t>لَحْظَةً، دَعْنِي أُفَكِّرُ …</a:t>
@@ -32387,6 +32599,7 @@
                   <a:srgbClr val="1B3B6F"/>
                 </a:solidFill>
                 <a:latin typeface="Amiri" pitchFamily="2" charset="-78"/>
+                <a:ea typeface="Amiri" pitchFamily="2" charset="-78"/>
                 <a:cs typeface="Amiri" pitchFamily="2" charset="-78"/>
               </a:rPr>
               <a:t>أَقْصِدُ …</a:t>
@@ -32558,6 +32771,7 @@
                   <a:srgbClr val="D4AF37"/>
                 </a:solidFill>
                 <a:latin typeface="Amiri" pitchFamily="2" charset="-78"/>
+                <a:ea typeface="Amiri" pitchFamily="2" charset="-78"/>
                 <a:cs typeface="Amiri" pitchFamily="2" charset="-78"/>
               </a:rPr>
               <a:t>م</a:t>
@@ -32878,6 +33092,7 @@
                   <a:srgbClr val="8A6D1E"/>
                 </a:solidFill>
                 <a:latin typeface="Amiri" pitchFamily="2" charset="-78"/>
+                <a:ea typeface="Amiri" pitchFamily="2" charset="-78"/>
                 <a:cs typeface="Amiri" pitchFamily="2" charset="-78"/>
               </a:rPr>
               <a:t>أَلْوَانُ أَفْعَلَ</a:t>
@@ -33181,6 +33396,7 @@
                   <a:srgbClr val="1B3B6F"/>
                 </a:solidFill>
                 <a:latin typeface="Amiri" pitchFamily="2" charset="-78"/>
+                <a:ea typeface="Amiri" pitchFamily="2" charset="-78"/>
                 <a:cs typeface="Amiri" pitchFamily="2" charset="-78"/>
               </a:rPr>
               <a:t>أَحْمَرُ</a:t>
@@ -33338,6 +33554,7 @@
                   <a:srgbClr val="1B3B6F"/>
                 </a:solidFill>
                 <a:latin typeface="Amiri" pitchFamily="2" charset="-78"/>
+                <a:ea typeface="Amiri" pitchFamily="2" charset="-78"/>
                 <a:cs typeface="Amiri" pitchFamily="2" charset="-78"/>
               </a:rPr>
               <a:t>حُمْرٌ</a:t>
@@ -33441,6 +33658,7 @@
                   <a:srgbClr val="1B3B6F"/>
                 </a:solidFill>
                 <a:latin typeface="Amiri" pitchFamily="2" charset="-78"/>
+                <a:ea typeface="Amiri" pitchFamily="2" charset="-78"/>
                 <a:cs typeface="Amiri" pitchFamily="2" charset="-78"/>
               </a:rPr>
               <a:t>حَمْرَاءُ</a:t>
@@ -33544,6 +33762,7 @@
                   <a:srgbClr val="1B3B6F"/>
                 </a:solidFill>
                 <a:latin typeface="Amiri" pitchFamily="2" charset="-78"/>
+                <a:ea typeface="Amiri" pitchFamily="2" charset="-78"/>
                 <a:cs typeface="Amiri" pitchFamily="2" charset="-78"/>
               </a:rPr>
               <a:t>أَحْمَرُ</a:t>
@@ -33809,6 +34028,7 @@
                   <a:srgbClr val="1B3B6F"/>
                 </a:solidFill>
                 <a:latin typeface="Amiri" pitchFamily="2" charset="-78"/>
+                <a:ea typeface="Amiri" pitchFamily="2" charset="-78"/>
                 <a:cs typeface="Amiri" pitchFamily="2" charset="-78"/>
               </a:rPr>
               <a:t>أَزْرَقُ</a:t>
@@ -33966,6 +34186,7 @@
                   <a:srgbClr val="1B3B6F"/>
                 </a:solidFill>
                 <a:latin typeface="Amiri" pitchFamily="2" charset="-78"/>
+                <a:ea typeface="Amiri" pitchFamily="2" charset="-78"/>
                 <a:cs typeface="Amiri" pitchFamily="2" charset="-78"/>
               </a:rPr>
               <a:t>زُرْقٌ</a:t>
@@ -34069,6 +34290,7 @@
                   <a:srgbClr val="1B3B6F"/>
                 </a:solidFill>
                 <a:latin typeface="Amiri" pitchFamily="2" charset="-78"/>
+                <a:ea typeface="Amiri" pitchFamily="2" charset="-78"/>
                 <a:cs typeface="Amiri" pitchFamily="2" charset="-78"/>
               </a:rPr>
               <a:t>زَرْقَاءُ</a:t>
@@ -34172,6 +34394,7 @@
                   <a:srgbClr val="1B3B6F"/>
                 </a:solidFill>
                 <a:latin typeface="Amiri" pitchFamily="2" charset="-78"/>
+                <a:ea typeface="Amiri" pitchFamily="2" charset="-78"/>
                 <a:cs typeface="Amiri" pitchFamily="2" charset="-78"/>
               </a:rPr>
               <a:t>أَزْرَقُ</a:t>
@@ -34437,6 +34660,7 @@
                   <a:srgbClr val="1B3B6F"/>
                 </a:solidFill>
                 <a:latin typeface="Amiri" pitchFamily="2" charset="-78"/>
+                <a:ea typeface="Amiri" pitchFamily="2" charset="-78"/>
                 <a:cs typeface="Amiri" pitchFamily="2" charset="-78"/>
               </a:rPr>
               <a:t>أَخْضَرُ</a:t>
@@ -34594,6 +34818,7 @@
                   <a:srgbClr val="1B3B6F"/>
                 </a:solidFill>
                 <a:latin typeface="Amiri" pitchFamily="2" charset="-78"/>
+                <a:ea typeface="Amiri" pitchFamily="2" charset="-78"/>
                 <a:cs typeface="Amiri" pitchFamily="2" charset="-78"/>
               </a:rPr>
               <a:t>خُضْرٌ</a:t>
@@ -34697,6 +34922,7 @@
                   <a:srgbClr val="1B3B6F"/>
                 </a:solidFill>
                 <a:latin typeface="Amiri" pitchFamily="2" charset="-78"/>
+                <a:ea typeface="Amiri" pitchFamily="2" charset="-78"/>
                 <a:cs typeface="Amiri" pitchFamily="2" charset="-78"/>
               </a:rPr>
               <a:t>خَضْرَاءُ</a:t>
@@ -34800,6 +35026,7 @@
                   <a:srgbClr val="1B3B6F"/>
                 </a:solidFill>
                 <a:latin typeface="Amiri" pitchFamily="2" charset="-78"/>
+                <a:ea typeface="Amiri" pitchFamily="2" charset="-78"/>
                 <a:cs typeface="Amiri" pitchFamily="2" charset="-78"/>
               </a:rPr>
               <a:t>أَخْضَرُ</a:t>
@@ -35065,6 +35292,7 @@
                   <a:srgbClr val="1B3B6F"/>
                 </a:solidFill>
                 <a:latin typeface="Amiri" pitchFamily="2" charset="-78"/>
+                <a:ea typeface="Amiri" pitchFamily="2" charset="-78"/>
                 <a:cs typeface="Amiri" pitchFamily="2" charset="-78"/>
               </a:rPr>
               <a:t>أَبْيَضُ</a:t>
@@ -35222,6 +35450,7 @@
                   <a:srgbClr val="1B3B6F"/>
                 </a:solidFill>
                 <a:latin typeface="Amiri" pitchFamily="2" charset="-78"/>
+                <a:ea typeface="Amiri" pitchFamily="2" charset="-78"/>
                 <a:cs typeface="Amiri" pitchFamily="2" charset="-78"/>
               </a:rPr>
               <a:t>بِيضٌ</a:t>
@@ -35325,6 +35554,7 @@
                   <a:srgbClr val="1B3B6F"/>
                 </a:solidFill>
                 <a:latin typeface="Amiri" pitchFamily="2" charset="-78"/>
+                <a:ea typeface="Amiri" pitchFamily="2" charset="-78"/>
                 <a:cs typeface="Amiri" pitchFamily="2" charset="-78"/>
               </a:rPr>
               <a:t>بَيْضَاءُ</a:t>
@@ -35428,6 +35658,7 @@
                   <a:srgbClr val="1B3B6F"/>
                 </a:solidFill>
                 <a:latin typeface="Amiri" pitchFamily="2" charset="-78"/>
+                <a:ea typeface="Amiri" pitchFamily="2" charset="-78"/>
                 <a:cs typeface="Amiri" pitchFamily="2" charset="-78"/>
               </a:rPr>
               <a:t>أَبْيَضُ</a:t>
@@ -35693,6 +35924,7 @@
                   <a:srgbClr val="1B3B6F"/>
                 </a:solidFill>
                 <a:latin typeface="Amiri" pitchFamily="2" charset="-78"/>
+                <a:ea typeface="Amiri" pitchFamily="2" charset="-78"/>
                 <a:cs typeface="Amiri" pitchFamily="2" charset="-78"/>
               </a:rPr>
               <a:t>أَسْوَدُ</a:t>
@@ -35850,6 +36082,7 @@
                   <a:srgbClr val="1B3B6F"/>
                 </a:solidFill>
                 <a:latin typeface="Amiri" pitchFamily="2" charset="-78"/>
+                <a:ea typeface="Amiri" pitchFamily="2" charset="-78"/>
                 <a:cs typeface="Amiri" pitchFamily="2" charset="-78"/>
               </a:rPr>
               <a:t>سُودٌ</a:t>
@@ -35953,6 +36186,7 @@
                   <a:srgbClr val="1B3B6F"/>
                 </a:solidFill>
                 <a:latin typeface="Amiri" pitchFamily="2" charset="-78"/>
+                <a:ea typeface="Amiri" pitchFamily="2" charset="-78"/>
                 <a:cs typeface="Amiri" pitchFamily="2" charset="-78"/>
               </a:rPr>
               <a:t>سَوْدَاءُ</a:t>
@@ -36056,6 +36290,7 @@
                   <a:srgbClr val="1B3B6F"/>
                 </a:solidFill>
                 <a:latin typeface="Amiri" pitchFamily="2" charset="-78"/>
+                <a:ea typeface="Amiri" pitchFamily="2" charset="-78"/>
                 <a:cs typeface="Amiri" pitchFamily="2" charset="-78"/>
               </a:rPr>
               <a:t>أَسْوَدُ</a:t>
@@ -36321,6 +36556,7 @@
                   <a:srgbClr val="1B3B6F"/>
                 </a:solidFill>
                 <a:latin typeface="Amiri" pitchFamily="2" charset="-78"/>
+                <a:ea typeface="Amiri" pitchFamily="2" charset="-78"/>
                 <a:cs typeface="Amiri" pitchFamily="2" charset="-78"/>
               </a:rPr>
               <a:t>أَصْفَرُ</a:t>
@@ -36478,6 +36714,7 @@
                   <a:srgbClr val="1B3B6F"/>
                 </a:solidFill>
                 <a:latin typeface="Amiri" pitchFamily="2" charset="-78"/>
+                <a:ea typeface="Amiri" pitchFamily="2" charset="-78"/>
                 <a:cs typeface="Amiri" pitchFamily="2" charset="-78"/>
               </a:rPr>
               <a:t>صُفْرٌ</a:t>
@@ -36581,6 +36818,7 @@
                   <a:srgbClr val="1B3B6F"/>
                 </a:solidFill>
                 <a:latin typeface="Amiri" pitchFamily="2" charset="-78"/>
+                <a:ea typeface="Amiri" pitchFamily="2" charset="-78"/>
                 <a:cs typeface="Amiri" pitchFamily="2" charset="-78"/>
               </a:rPr>
               <a:t>صَفْرَاءُ</a:t>
@@ -36684,6 +36922,7 @@
                   <a:srgbClr val="1B3B6F"/>
                 </a:solidFill>
                 <a:latin typeface="Amiri" pitchFamily="2" charset="-78"/>
+                <a:ea typeface="Amiri" pitchFamily="2" charset="-78"/>
                 <a:cs typeface="Amiri" pitchFamily="2" charset="-78"/>
               </a:rPr>
               <a:t>أَصْفَرُ</a:t>
@@ -36817,6 +37056,7 @@
                   <a:srgbClr val="D4AF37"/>
                 </a:solidFill>
                 <a:latin typeface="Amiri" pitchFamily="2" charset="-78"/>
+                <a:ea typeface="Amiri" pitchFamily="2" charset="-78"/>
                 <a:cs typeface="Amiri" pitchFamily="2" charset="-78"/>
               </a:rPr>
               <a:t>م</a:t>
@@ -37137,6 +37377,7 @@
                   <a:srgbClr val="8A6D1E"/>
                 </a:solidFill>
                 <a:latin typeface="Amiri" pitchFamily="2" charset="-78"/>
+                <a:ea typeface="Amiri" pitchFamily="2" charset="-78"/>
                 <a:cs typeface="Amiri" pitchFamily="2" charset="-78"/>
               </a:rPr>
               <a:t>الدِّقَّةُ فِي الوَصْفِ</a:t>
@@ -37440,6 +37681,7 @@
                   <a:srgbClr val="1B3B6F"/>
                 </a:solidFill>
                 <a:latin typeface="Amiri" pitchFamily="2" charset="-78"/>
+                <a:ea typeface="Amiri" pitchFamily="2" charset="-78"/>
                 <a:cs typeface="Amiri" pitchFamily="2" charset="-78"/>
               </a:rPr>
               <a:t>بُنِّيٌّ</a:t>
@@ -37597,6 +37839,7 @@
                   <a:srgbClr val="1B3B6F"/>
                 </a:solidFill>
                 <a:latin typeface="Amiri" pitchFamily="2" charset="-78"/>
+                <a:ea typeface="Amiri" pitchFamily="2" charset="-78"/>
                 <a:cs typeface="Amiri" pitchFamily="2" charset="-78"/>
               </a:rPr>
               <a:t>بُنِّيَّةٌ</a:t>
@@ -37700,6 +37943,7 @@
                   <a:srgbClr val="1B3B6F"/>
                 </a:solidFill>
                 <a:latin typeface="Amiri" pitchFamily="2" charset="-78"/>
+                <a:ea typeface="Amiri" pitchFamily="2" charset="-78"/>
                 <a:cs typeface="Amiri" pitchFamily="2" charset="-78"/>
               </a:rPr>
               <a:t>بُنِّيَّةٌ</a:t>
@@ -37803,6 +38047,7 @@
                   <a:srgbClr val="1B3B6F"/>
                 </a:solidFill>
                 <a:latin typeface="Amiri" pitchFamily="2" charset="-78"/>
+                <a:ea typeface="Amiri" pitchFamily="2" charset="-78"/>
                 <a:cs typeface="Amiri" pitchFamily="2" charset="-78"/>
               </a:rPr>
               <a:t>بُنِّيٌّ</a:t>
@@ -38068,6 +38313,7 @@
                   <a:srgbClr val="1B3B6F"/>
                 </a:solidFill>
                 <a:latin typeface="Amiri" pitchFamily="2" charset="-78"/>
+                <a:ea typeface="Amiri" pitchFamily="2" charset="-78"/>
                 <a:cs typeface="Amiri" pitchFamily="2" charset="-78"/>
               </a:rPr>
               <a:t>رَمَادِيٌّ</a:t>
@@ -38225,6 +38471,7 @@
                   <a:srgbClr val="1B3B6F"/>
                 </a:solidFill>
                 <a:latin typeface="Amiri" pitchFamily="2" charset="-78"/>
+                <a:ea typeface="Amiri" pitchFamily="2" charset="-78"/>
                 <a:cs typeface="Amiri" pitchFamily="2" charset="-78"/>
               </a:rPr>
               <a:t>رَمَادِيَّةٌ</a:t>
@@ -38328,6 +38575,7 @@
                   <a:srgbClr val="1B3B6F"/>
                 </a:solidFill>
                 <a:latin typeface="Amiri" pitchFamily="2" charset="-78"/>
+                <a:ea typeface="Amiri" pitchFamily="2" charset="-78"/>
                 <a:cs typeface="Amiri" pitchFamily="2" charset="-78"/>
               </a:rPr>
               <a:t>رَمَادِيٌّ</a:t>
@@ -38593,6 +38841,7 @@
                   <a:srgbClr val="1B3B6F"/>
                 </a:solidFill>
                 <a:latin typeface="Amiri" pitchFamily="2" charset="-78"/>
+                <a:ea typeface="Amiri" pitchFamily="2" charset="-78"/>
                 <a:cs typeface="Amiri" pitchFamily="2" charset="-78"/>
               </a:rPr>
               <a:t>بُرْتُقَالِيٌّ · وَرْدِيٌّ</a:t>
@@ -38750,6 +38999,7 @@
                   <a:srgbClr val="1B3B6F"/>
                 </a:solidFill>
                 <a:latin typeface="Amiri" pitchFamily="2" charset="-78"/>
+                <a:ea typeface="Amiri" pitchFamily="2" charset="-78"/>
                 <a:cs typeface="Amiri" pitchFamily="2" charset="-78"/>
               </a:rPr>
               <a:t>بُرْتُقَالِيَّةٌ · وَرْدِيَّةٌ</a:t>
@@ -39015,6 +39265,7 @@
                   <a:srgbClr val="1B3B6F"/>
                 </a:solidFill>
                 <a:latin typeface="Amiri" pitchFamily="2" charset="-78"/>
+                <a:ea typeface="Amiri" pitchFamily="2" charset="-78"/>
                 <a:cs typeface="Amiri" pitchFamily="2" charset="-78"/>
               </a:rPr>
               <a:t>فَاتِحٌ · غَامِقٌ</a:t>
@@ -39172,6 +39423,7 @@
                   <a:srgbClr val="1B3B6F"/>
                 </a:solidFill>
                 <a:latin typeface="Amiri" pitchFamily="2" charset="-78"/>
+                <a:ea typeface="Amiri" pitchFamily="2" charset="-78"/>
                 <a:cs typeface="Amiri" pitchFamily="2" charset="-78"/>
               </a:rPr>
               <a:t>فَاتِحَةٌ · غَامِقَةٌ</a:t>
@@ -39437,6 +39689,7 @@
                   <a:srgbClr val="1B3B6F"/>
                 </a:solidFill>
                 <a:latin typeface="Amiri" pitchFamily="2" charset="-78"/>
+                <a:ea typeface="Amiri" pitchFamily="2" charset="-78"/>
                 <a:cs typeface="Amiri" pitchFamily="2" charset="-78"/>
               </a:rPr>
               <a:t>مُخَطَّطٌ · مُنَقَّطٌ</a:t>
@@ -39594,6 +39847,7 @@
                   <a:srgbClr val="1B3B6F"/>
                 </a:solidFill>
                 <a:latin typeface="Amiri" pitchFamily="2" charset="-78"/>
+                <a:ea typeface="Amiri" pitchFamily="2" charset="-78"/>
                 <a:cs typeface="Amiri" pitchFamily="2" charset="-78"/>
               </a:rPr>
               <a:t>مُخَطَّطَةٌ · مُنَقَّطَةٌ</a:t>
@@ -39859,6 +40113,7 @@
                   <a:srgbClr val="1B3B6F"/>
                 </a:solidFill>
                 <a:latin typeface="Amiri" pitchFamily="2" charset="-78"/>
+                <a:ea typeface="Amiri" pitchFamily="2" charset="-78"/>
                 <a:cs typeface="Amiri" pitchFamily="2" charset="-78"/>
               </a:rPr>
               <a:t>مَصْنُوعٌ مِنْ …</a:t>
@@ -40016,6 +40271,7 @@
                   <a:srgbClr val="1B3B6F"/>
                 </a:solidFill>
                 <a:latin typeface="Amiri" pitchFamily="2" charset="-78"/>
+                <a:ea typeface="Amiri" pitchFamily="2" charset="-78"/>
                 <a:cs typeface="Amiri" pitchFamily="2" charset="-78"/>
               </a:rPr>
               <a:t>مَصْنُوعَةٌ</a:t>
@@ -40119,6 +40375,7 @@
                   <a:srgbClr val="1B3B6F"/>
                 </a:solidFill>
                 <a:latin typeface="Amiri" pitchFamily="2" charset="-78"/>
+                <a:ea typeface="Amiri" pitchFamily="2" charset="-78"/>
                 <a:cs typeface="Amiri" pitchFamily="2" charset="-78"/>
               </a:rPr>
               <a:t>مَصْنُوعَةٌ</a:t>
@@ -40252,6 +40509,7 @@
                   <a:srgbClr val="D4AF37"/>
                 </a:solidFill>
                 <a:latin typeface="Amiri" pitchFamily="2" charset="-78"/>
+                <a:ea typeface="Amiri" pitchFamily="2" charset="-78"/>
                 <a:cs typeface="Amiri" pitchFamily="2" charset="-78"/>
               </a:rPr>
               <a:t>م</a:t>
@@ -40572,6 +40830,7 @@
                   <a:srgbClr val="8A6D1E"/>
                 </a:solidFill>
                 <a:latin typeface="Amiri" pitchFamily="2" charset="-78"/>
+                <a:ea typeface="Amiri" pitchFamily="2" charset="-78"/>
                 <a:cs typeface="Amiri" pitchFamily="2" charset="-78"/>
               </a:rPr>
               <a:t>فِي الغُرَفِ</a:t>
@@ -41748,6 +42007,7 @@
                   <a:srgbClr val="1B3B6F"/>
                 </a:solidFill>
                 <a:latin typeface="Amiri" pitchFamily="2" charset="-78"/>
+                <a:ea typeface="Amiri" pitchFamily="2" charset="-78"/>
                 <a:cs typeface="Amiri" pitchFamily="2" charset="-78"/>
               </a:rPr>
               <a:t>دَوْرُكَ!</a:t>
@@ -41824,6 +42084,7 @@
                   <a:srgbClr val="1B3B6F"/>
                 </a:solidFill>
                 <a:latin typeface="Amiri" pitchFamily="2" charset="-78"/>
+                <a:ea typeface="Amiri" pitchFamily="2" charset="-78"/>
                 <a:cs typeface="Amiri" pitchFamily="2" charset="-78"/>
               </a:rPr>
               <a:t>أَحْسَنْتَ! / أَحْسَنْتِ!</a:t>
@@ -41900,6 +42161,7 @@
                   <a:srgbClr val="1B3B6F"/>
                 </a:solidFill>
                 <a:latin typeface="Amiri" pitchFamily="2" charset="-78"/>
+                <a:ea typeface="Amiri" pitchFamily="2" charset="-78"/>
                 <a:cs typeface="Amiri" pitchFamily="2" charset="-78"/>
               </a:rPr>
               <a:t>تَكَلَّمْ أَكْثَرَ، مِنْ فَضْلِكَ</a:t>
@@ -41976,6 +42238,7 @@
                   <a:srgbClr val="1B3B6F"/>
                 </a:solidFill>
                 <a:latin typeface="Amiri" pitchFamily="2" charset="-78"/>
+                <a:ea typeface="Amiri" pitchFamily="2" charset="-78"/>
                 <a:cs typeface="Amiri" pitchFamily="2" charset="-78"/>
               </a:rPr>
               <a:t>لِمَاذَا؟</a:t>
@@ -42147,6 +42410,7 @@
                   <a:srgbClr val="D4AF37"/>
                 </a:solidFill>
                 <a:latin typeface="Amiri" pitchFamily="2" charset="-78"/>
+                <a:ea typeface="Amiri" pitchFamily="2" charset="-78"/>
                 <a:cs typeface="Amiri" pitchFamily="2" charset="-78"/>
               </a:rPr>
               <a:t>م</a:t>
@@ -42467,6 +42731,7 @@
                   <a:srgbClr val="8A6D1E"/>
                 </a:solidFill>
                 <a:latin typeface="Amiri" pitchFamily="2" charset="-78"/>
+                <a:ea typeface="Amiri" pitchFamily="2" charset="-78"/>
                 <a:cs typeface="Amiri" pitchFamily="2" charset="-78"/>
               </a:rPr>
               <a:t>حَقِيبَتِي ضَائِعَةٌ</a:t>
@@ -42747,6 +43012,7 @@
                   <a:srgbClr val="1B3B6F"/>
                 </a:solidFill>
                 <a:latin typeface="Amiri" pitchFamily="2" charset="-78"/>
+                <a:ea typeface="Amiri" pitchFamily="2" charset="-78"/>
                 <a:cs typeface="Amiri" pitchFamily="2" charset="-78"/>
               </a:rPr>
               <a:t>حَقِيبَتِي لَمْ …</a:t>
@@ -42823,6 +43089,7 @@
                   <a:srgbClr val="1B3B6F"/>
                 </a:solidFill>
                 <a:latin typeface="Amiri" pitchFamily="2" charset="-78"/>
+                <a:ea typeface="Amiri" pitchFamily="2" charset="-78"/>
                 <a:cs typeface="Amiri" pitchFamily="2" charset="-78"/>
               </a:rPr>
               <a:t>مَا المُشْكِلَةُ؟</a:t>
@@ -42991,6 +43258,7 @@
                   <a:srgbClr val="1B3B6F"/>
                 </a:solidFill>
                 <a:latin typeface="Amiri" pitchFamily="2" charset="-78"/>
+                <a:ea typeface="Amiri" pitchFamily="2" charset="-78"/>
                 <a:cs typeface="Amiri" pitchFamily="2" charset="-78"/>
               </a:rPr>
               <a:t>هِيَ زَرْقَاءُ / حَمْرَاءُ …</a:t>
@@ -43067,6 +43335,7 @@
                   <a:srgbClr val="1B3B6F"/>
                 </a:solidFill>
                 <a:latin typeface="Amiri" pitchFamily="2" charset="-78"/>
+                <a:ea typeface="Amiri" pitchFamily="2" charset="-78"/>
                 <a:cs typeface="Amiri" pitchFamily="2" charset="-78"/>
               </a:rPr>
               <a:t>مَا لَوْنُهَا؟</a:t>
@@ -43235,6 +43504,7 @@
                   <a:srgbClr val="1B3B6F"/>
                 </a:solidFill>
                 <a:latin typeface="Amiri" pitchFamily="2" charset="-78"/>
+                <a:ea typeface="Amiri" pitchFamily="2" charset="-78"/>
                 <a:cs typeface="Amiri" pitchFamily="2" charset="-78"/>
               </a:rPr>
               <a:t>هِيَ … وَمَصْنُوعَةٌ مِنْ …</a:t>
@@ -43311,6 +43581,7 @@
                   <a:srgbClr val="1B3B6F"/>
                 </a:solidFill>
                 <a:latin typeface="Amiri" pitchFamily="2" charset="-78"/>
+                <a:ea typeface="Amiri" pitchFamily="2" charset="-78"/>
                 <a:cs typeface="Amiri" pitchFamily="2" charset="-78"/>
               </a:rPr>
               <a:t>هَلْ هِيَ كَبِيرَةٌ أَمْ صَغِيرَةٌ؟</a:t>
@@ -43479,6 +43750,7 @@
                   <a:srgbClr val="1B3B6F"/>
                 </a:solidFill>
                 <a:latin typeface="Amiri" pitchFamily="2" charset="-78"/>
+                <a:ea typeface="Amiri" pitchFamily="2" charset="-78"/>
                 <a:cs typeface="Amiri" pitchFamily="2" charset="-78"/>
               </a:rPr>
               <a:t>فِيهَا … وَ…</a:t>
@@ -43555,6 +43827,7 @@
                   <a:srgbClr val="1B3B6F"/>
                 </a:solidFill>
                 <a:latin typeface="Amiri" pitchFamily="2" charset="-78"/>
+                <a:ea typeface="Amiri" pitchFamily="2" charset="-78"/>
                 <a:cs typeface="Amiri" pitchFamily="2" charset="-78"/>
               </a:rPr>
               <a:t>مَاذَا يُوجَدُ فِيهَا؟</a:t>
@@ -43723,6 +43996,7 @@
                   <a:srgbClr val="1B3B6F"/>
                 </a:solidFill>
                 <a:latin typeface="Amiri" pitchFamily="2" charset="-78"/>
+                <a:ea typeface="Amiri" pitchFamily="2" charset="-78"/>
                 <a:cs typeface="Amiri" pitchFamily="2" charset="-78"/>
               </a:rPr>
               <a:t>أَنْزِلُ فِي فُنْدُقِ …</a:t>
@@ -43799,6 +44073,7 @@
                   <a:srgbClr val="1B3B6F"/>
                 </a:solidFill>
                 <a:latin typeface="Amiri" pitchFamily="2" charset="-78"/>
+                <a:ea typeface="Amiri" pitchFamily="2" charset="-78"/>
                 <a:cs typeface="Amiri" pitchFamily="2" charset="-78"/>
               </a:rPr>
               <a:t>أَيْنَ تَنْزِلُ فِي المَدِينَةِ؟</a:t>
@@ -44073,6 +44348,7 @@
                   <a:srgbClr val="D4AF37"/>
                 </a:solidFill>
                 <a:latin typeface="Amiri" pitchFamily="2" charset="-78"/>
+                <a:ea typeface="Amiri" pitchFamily="2" charset="-78"/>
                 <a:cs typeface="Amiri" pitchFamily="2" charset="-78"/>
               </a:rPr>
               <a:t>م</a:t>
@@ -44393,6 +44669,7 @@
                   <a:srgbClr val="8A6D1E"/>
                 </a:solidFill>
                 <a:latin typeface="Amiri" pitchFamily="2" charset="-78"/>
+                <a:ea typeface="Amiri" pitchFamily="2" charset="-78"/>
                 <a:cs typeface="Amiri" pitchFamily="2" charset="-78"/>
               </a:rPr>
               <a:t>فِي مَحَلِّ الدِّهَانِ</a:t>
@@ -44673,6 +44950,7 @@
                   <a:srgbClr val="1B3B6F"/>
                 </a:solidFill>
                 <a:latin typeface="Amiri" pitchFamily="2" charset="-78"/>
+                <a:ea typeface="Amiri" pitchFamily="2" charset="-78"/>
                 <a:cs typeface="Amiri" pitchFamily="2" charset="-78"/>
               </a:rPr>
               <a:t>أُرِيدُ أَنْ أَدْهَنَ …</a:t>
@@ -44749,6 +45027,7 @@
                   <a:srgbClr val="1B3B6F"/>
                 </a:solidFill>
                 <a:latin typeface="Amiri" pitchFamily="2" charset="-78"/>
+                <a:ea typeface="Amiri" pitchFamily="2" charset="-78"/>
                 <a:cs typeface="Amiri" pitchFamily="2" charset="-78"/>
               </a:rPr>
               <a:t>مَاذَا تُرِيدُ أَنْ تَدْهَنَ؟</a:t>
@@ -44917,6 +45196,7 @@
                   <a:srgbClr val="1B3B6F"/>
                 </a:solidFill>
                 <a:latin typeface="Amiri" pitchFamily="2" charset="-78"/>
+                <a:ea typeface="Amiri" pitchFamily="2" charset="-78"/>
                 <a:cs typeface="Amiri" pitchFamily="2" charset="-78"/>
               </a:rPr>
               <a:t>أُرِيدُ لَوْنًا أَخْضَرَ فَاتِحًا / …</a:t>
@@ -44993,6 +45273,7 @@
                   <a:srgbClr val="1B3B6F"/>
                 </a:solidFill>
                 <a:latin typeface="Amiri" pitchFamily="2" charset="-78"/>
+                <a:ea typeface="Amiri" pitchFamily="2" charset="-78"/>
                 <a:cs typeface="Amiri" pitchFamily="2" charset="-78"/>
               </a:rPr>
               <a:t>أَيَّ لَوْنٍ لِلْجُدْرَانِ؟</a:t>
@@ -45161,6 +45442,7 @@
                   <a:srgbClr val="1B3B6F"/>
                 </a:solidFill>
                 <a:latin typeface="Amiri" pitchFamily="2" charset="-78"/>
+                <a:ea typeface="Amiri" pitchFamily="2" charset="-78"/>
                 <a:cs typeface="Amiri" pitchFamily="2" charset="-78"/>
               </a:rPr>
               <a:t>البَابُ أَبْيَضُ، لِأَنَّ …</a:t>
@@ -45237,6 +45519,7 @@
                   <a:srgbClr val="1B3B6F"/>
                 </a:solidFill>
                 <a:latin typeface="Amiri" pitchFamily="2" charset="-78"/>
+                <a:ea typeface="Amiri" pitchFamily="2" charset="-78"/>
                 <a:cs typeface="Amiri" pitchFamily="2" charset="-78"/>
               </a:rPr>
               <a:t>وَالبَابُ؟</a:t>
@@ -45340,6 +45623,7 @@
                   <a:srgbClr val="1B3B6F"/>
                 </a:solidFill>
                 <a:latin typeface="Amiri" pitchFamily="2" charset="-78"/>
+                <a:ea typeface="Amiri" pitchFamily="2" charset="-78"/>
                 <a:cs typeface="Amiri" pitchFamily="2" charset="-78"/>
               </a:rPr>
               <a:t>كَمْ عُلْبَةً …؟</a:t>
@@ -45416,6 +45700,7 @@
                   <a:srgbClr val="1B3B6F"/>
                 </a:solidFill>
                 <a:latin typeface="Amiri" pitchFamily="2" charset="-78"/>
+                <a:ea typeface="Amiri" pitchFamily="2" charset="-78"/>
                 <a:cs typeface="Amiri" pitchFamily="2" charset="-78"/>
               </a:rPr>
               <a:t>هٰذِهِ العُلْبَةُ بِعِشْرِينَ دِينَارًا.</a:t>
@@ -45519,6 +45804,7 @@
                   <a:srgbClr val="1B3B6F"/>
                 </a:solidFill>
                 <a:latin typeface="Amiri" pitchFamily="2" charset="-78"/>
+                <a:ea typeface="Amiri" pitchFamily="2" charset="-78"/>
                 <a:cs typeface="Amiri" pitchFamily="2" charset="-78"/>
               </a:rPr>
               <a:t>الأَثَاثُ … وَالسَّتَائِرُ …</a:t>
@@ -45595,6 +45881,7 @@
                   <a:srgbClr val="1B3B6F"/>
                 </a:solidFill>
                 <a:latin typeface="Amiri" pitchFamily="2" charset="-78"/>
+                <a:ea typeface="Amiri" pitchFamily="2" charset="-78"/>
                 <a:cs typeface="Amiri" pitchFamily="2" charset="-78"/>
               </a:rPr>
               <a:t>مَا لَوْنُ الأَثَاثِ فِي غُرْفَتِكَ؟</a:t>
@@ -45769,13 +46056,9 @@
     <a:fontScheme name="Office">
       <a:majorFont>
         <a:latin typeface="Calibri Light" panose="020F0302020204030204"/>
-        <a:ea typeface=""/>
-        <a:cs typeface=""/>
-        <a:font script="Jpan" typeface="游ゴシック Light"/>
-        <a:font script="Hang" typeface="맑은 고딕"/>
-        <a:font script="Hans" typeface="等线 Light"/>
-        <a:font script="Hant" typeface="新細明體"/>
-        <a:font script="Arab" typeface="Times New Roman"/>
+        <a:ea typeface="Amiri" pitchFamily="2" charset="-78"/>
+        <a:cs typeface="Amiri" pitchFamily="2" charset="-78"/>
+        <a:font script="Arab" typeface="Amiri"/>
         <a:font script="Hebr" typeface="Times New Roman"/>
         <a:font script="Thai" typeface="Angsana New"/>
         <a:font script="Ethi" typeface="Nyala"/>
@@ -45821,13 +46104,9 @@
       </a:majorFont>
       <a:minorFont>
         <a:latin typeface="Calibri" panose="020F0502020204030204"/>
-        <a:ea typeface=""/>
-        <a:cs typeface=""/>
-        <a:font script="Jpan" typeface="游ゴシック"/>
-        <a:font script="Hang" typeface="맑은 고딕"/>
-        <a:font script="Hans" typeface="等线"/>
-        <a:font script="Hant" typeface="新細明體"/>
-        <a:font script="Arab" typeface="Arial"/>
+        <a:ea typeface="Amiri" pitchFamily="2" charset="-78"/>
+        <a:cs typeface="Amiri" pitchFamily="2" charset="-78"/>
+        <a:font script="Arab" typeface="Amiri"/>
         <a:font script="Hebr" typeface="Arial"/>
         <a:font script="Thai" typeface="Cordia New"/>
         <a:font script="Ethi" typeface="Nyala"/>
